--- a/Other/Kelas5SD/07Pecahan/img/CampuranKeBiasa.pptx
+++ b/Other/Kelas5SD/07Pecahan/img/CampuranKeBiasa.pptx
@@ -9,6 +9,11 @@
     <p:sldId id="257" r:id="rId3"/>
     <p:sldId id="259" r:id="rId4"/>
     <p:sldId id="258" r:id="rId5"/>
+    <p:sldId id="260" r:id="rId6"/>
+    <p:sldId id="261" r:id="rId7"/>
+    <p:sldId id="262" r:id="rId8"/>
+    <p:sldId id="263" r:id="rId9"/>
+    <p:sldId id="264" r:id="rId10"/>
   </p:sldIdLst>
   <p:sldSz cx="3421063" cy="1922463"/>
   <p:notesSz cx="6858000" cy="9144000"/>
@@ -291,7 +296,7 @@
           <a:p>
             <a:fld id="{99C44E58-8384-447B-9288-B3BFE7327055}" type="datetimeFigureOut">
               <a:rPr lang="id-ID" smtClean="0"/>
-              <a:t>29/07/2026</a:t>
+              <a:t>31/07/2026</a:t>
             </a:fld>
             <a:endParaRPr lang="id-ID"/>
           </a:p>
@@ -469,7 +474,7 @@
           <a:p>
             <a:fld id="{99C44E58-8384-447B-9288-B3BFE7327055}" type="datetimeFigureOut">
               <a:rPr lang="id-ID" smtClean="0"/>
-              <a:t>29/07/2026</a:t>
+              <a:t>31/07/2026</a:t>
             </a:fld>
             <a:endParaRPr lang="id-ID"/>
           </a:p>
@@ -657,7 +662,7 @@
           <a:p>
             <a:fld id="{99C44E58-8384-447B-9288-B3BFE7327055}" type="datetimeFigureOut">
               <a:rPr lang="id-ID" smtClean="0"/>
-              <a:t>29/07/2026</a:t>
+              <a:t>31/07/2026</a:t>
             </a:fld>
             <a:endParaRPr lang="id-ID"/>
           </a:p>
@@ -835,7 +840,7 @@
           <a:p>
             <a:fld id="{99C44E58-8384-447B-9288-B3BFE7327055}" type="datetimeFigureOut">
               <a:rPr lang="id-ID" smtClean="0"/>
-              <a:t>29/07/2026</a:t>
+              <a:t>31/07/2026</a:t>
             </a:fld>
             <a:endParaRPr lang="id-ID"/>
           </a:p>
@@ -1089,7 +1094,7 @@
           <a:p>
             <a:fld id="{99C44E58-8384-447B-9288-B3BFE7327055}" type="datetimeFigureOut">
               <a:rPr lang="id-ID" smtClean="0"/>
-              <a:t>29/07/2026</a:t>
+              <a:t>31/07/2026</a:t>
             </a:fld>
             <a:endParaRPr lang="id-ID"/>
           </a:p>
@@ -1385,7 +1390,7 @@
           <a:p>
             <a:fld id="{99C44E58-8384-447B-9288-B3BFE7327055}" type="datetimeFigureOut">
               <a:rPr lang="id-ID" smtClean="0"/>
-              <a:t>29/07/2026</a:t>
+              <a:t>31/07/2026</a:t>
             </a:fld>
             <a:endParaRPr lang="id-ID"/>
           </a:p>
@@ -1820,7 +1825,7 @@
           <a:p>
             <a:fld id="{99C44E58-8384-447B-9288-B3BFE7327055}" type="datetimeFigureOut">
               <a:rPr lang="id-ID" smtClean="0"/>
-              <a:t>29/07/2026</a:t>
+              <a:t>31/07/2026</a:t>
             </a:fld>
             <a:endParaRPr lang="id-ID"/>
           </a:p>
@@ -1946,7 +1951,7 @@
           <a:p>
             <a:fld id="{99C44E58-8384-447B-9288-B3BFE7327055}" type="datetimeFigureOut">
               <a:rPr lang="id-ID" smtClean="0"/>
-              <a:t>29/07/2026</a:t>
+              <a:t>31/07/2026</a:t>
             </a:fld>
             <a:endParaRPr lang="id-ID"/>
           </a:p>
@@ -2049,7 +2054,7 @@
           <a:p>
             <a:fld id="{99C44E58-8384-447B-9288-B3BFE7327055}" type="datetimeFigureOut">
               <a:rPr lang="id-ID" smtClean="0"/>
-              <a:t>29/07/2026</a:t>
+              <a:t>31/07/2026</a:t>
             </a:fld>
             <a:endParaRPr lang="id-ID"/>
           </a:p>
@@ -2334,7 +2339,7 @@
           <a:p>
             <a:fld id="{99C44E58-8384-447B-9288-B3BFE7327055}" type="datetimeFigureOut">
               <a:rPr lang="id-ID" smtClean="0"/>
-              <a:t>29/07/2026</a:t>
+              <a:t>31/07/2026</a:t>
             </a:fld>
             <a:endParaRPr lang="id-ID"/>
           </a:p>
@@ -2595,7 +2600,7 @@
           <a:p>
             <a:fld id="{99C44E58-8384-447B-9288-B3BFE7327055}" type="datetimeFigureOut">
               <a:rPr lang="id-ID" smtClean="0"/>
-              <a:t>29/07/2026</a:t>
+              <a:t>31/07/2026</a:t>
             </a:fld>
             <a:endParaRPr lang="id-ID"/>
           </a:p>
@@ -2816,7 +2821,7 @@
           <a:p>
             <a:fld id="{99C44E58-8384-447B-9288-B3BFE7327055}" type="datetimeFigureOut">
               <a:rPr lang="id-ID" smtClean="0"/>
-              <a:t>29/07/2026</a:t>
+              <a:t>31/07/2026</a:t>
             </a:fld>
             <a:endParaRPr lang="id-ID"/>
           </a:p>
@@ -5482,9 +5487,3402 @@
   <p:timing>
     <p:tnLst>
       <p:par>
+        <p:cTn id="1" dur="indefinite" restart="never" nodeType="tmRoot">
+          <p:childTnLst>
+            <p:seq concurrent="1" nextAc="seek">
+              <p:cTn id="2" dur="indefinite" nodeType="mainSeq">
+                <p:childTnLst>
+                  <p:par>
+                    <p:cTn id="3" fill="hold">
+                      <p:stCondLst>
+                        <p:cond delay="indefinite"/>
+                        <p:cond evt="onBegin" delay="0">
+                          <p:tn val="2"/>
+                        </p:cond>
+                      </p:stCondLst>
+                      <p:childTnLst>
+                        <p:par>
+                          <p:cTn id="4" fill="hold">
+                            <p:stCondLst>
+                              <p:cond delay="0"/>
+                            </p:stCondLst>
+                            <p:childTnLst>
+                              <p:par>
+                                <p:cTn id="5" presetID="10" presetClass="exit" presetSubtype="0" fill="hold" grpId="0" nodeType="withEffect">
+                                  <p:stCondLst>
+                                    <p:cond delay="1000"/>
+                                  </p:stCondLst>
+                                  <p:childTnLst>
+                                    <p:animEffect transition="out" filter="fade">
+                                      <p:cBhvr>
+                                        <p:cTn id="6" dur="500"/>
+                                        <p:tgtEl>
+                                          <p:spTgt spid="5"/>
+                                        </p:tgtEl>
+                                      </p:cBhvr>
+                                    </p:animEffect>
+                                    <p:set>
+                                      <p:cBhvr>
+                                        <p:cTn id="7" dur="1" fill="hold">
+                                          <p:stCondLst>
+                                            <p:cond delay="499"/>
+                                          </p:stCondLst>
+                                        </p:cTn>
+                                        <p:tgtEl>
+                                          <p:spTgt spid="5"/>
+                                        </p:tgtEl>
+                                        <p:attrNameLst>
+                                          <p:attrName>style.visibility</p:attrName>
+                                        </p:attrNameLst>
+                                      </p:cBhvr>
+                                      <p:to>
+                                        <p:strVal val="hidden"/>
+                                      </p:to>
+                                    </p:set>
+                                  </p:childTnLst>
+                                </p:cTn>
+                              </p:par>
+                              <p:par>
+                                <p:cTn id="8" presetID="10" presetClass="exit" presetSubtype="0" fill="hold" grpId="0" nodeType="withEffect">
+                                  <p:stCondLst>
+                                    <p:cond delay="1000"/>
+                                  </p:stCondLst>
+                                  <p:childTnLst>
+                                    <p:animEffect transition="out" filter="fade">
+                                      <p:cBhvr>
+                                        <p:cTn id="9" dur="500"/>
+                                        <p:tgtEl>
+                                          <p:spTgt spid="6"/>
+                                        </p:tgtEl>
+                                      </p:cBhvr>
+                                    </p:animEffect>
+                                    <p:set>
+                                      <p:cBhvr>
+                                        <p:cTn id="10" dur="1" fill="hold">
+                                          <p:stCondLst>
+                                            <p:cond delay="499"/>
+                                          </p:stCondLst>
+                                        </p:cTn>
+                                        <p:tgtEl>
+                                          <p:spTgt spid="6"/>
+                                        </p:tgtEl>
+                                        <p:attrNameLst>
+                                          <p:attrName>style.visibility</p:attrName>
+                                        </p:attrNameLst>
+                                      </p:cBhvr>
+                                      <p:to>
+                                        <p:strVal val="hidden"/>
+                                      </p:to>
+                                    </p:set>
+                                  </p:childTnLst>
+                                </p:cTn>
+                              </p:par>
+                              <p:par>
+                                <p:cTn id="11" presetID="10" presetClass="exit" presetSubtype="0" fill="hold" grpId="0" nodeType="withEffect">
+                                  <p:stCondLst>
+                                    <p:cond delay="1000"/>
+                                  </p:stCondLst>
+                                  <p:childTnLst>
+                                    <p:animEffect transition="out" filter="fade">
+                                      <p:cBhvr>
+                                        <p:cTn id="12" dur="500"/>
+                                        <p:tgtEl>
+                                          <p:spTgt spid="7"/>
+                                        </p:tgtEl>
+                                      </p:cBhvr>
+                                    </p:animEffect>
+                                    <p:set>
+                                      <p:cBhvr>
+                                        <p:cTn id="13" dur="1" fill="hold">
+                                          <p:stCondLst>
+                                            <p:cond delay="499"/>
+                                          </p:stCondLst>
+                                        </p:cTn>
+                                        <p:tgtEl>
+                                          <p:spTgt spid="7"/>
+                                        </p:tgtEl>
+                                        <p:attrNameLst>
+                                          <p:attrName>style.visibility</p:attrName>
+                                        </p:attrNameLst>
+                                      </p:cBhvr>
+                                      <p:to>
+                                        <p:strVal val="hidden"/>
+                                      </p:to>
+                                    </p:set>
+                                  </p:childTnLst>
+                                </p:cTn>
+                              </p:par>
+                              <p:par>
+                                <p:cTn id="14" presetID="10" presetClass="exit" presetSubtype="0" fill="hold" grpId="0" nodeType="withEffect">
+                                  <p:stCondLst>
+                                    <p:cond delay="1000"/>
+                                  </p:stCondLst>
+                                  <p:childTnLst>
+                                    <p:animEffect transition="out" filter="fade">
+                                      <p:cBhvr>
+                                        <p:cTn id="15" dur="500"/>
+                                        <p:tgtEl>
+                                          <p:spTgt spid="8"/>
+                                        </p:tgtEl>
+                                      </p:cBhvr>
+                                    </p:animEffect>
+                                    <p:set>
+                                      <p:cBhvr>
+                                        <p:cTn id="16" dur="1" fill="hold">
+                                          <p:stCondLst>
+                                            <p:cond delay="499"/>
+                                          </p:stCondLst>
+                                        </p:cTn>
+                                        <p:tgtEl>
+                                          <p:spTgt spid="8"/>
+                                        </p:tgtEl>
+                                        <p:attrNameLst>
+                                          <p:attrName>style.visibility</p:attrName>
+                                        </p:attrNameLst>
+                                      </p:cBhvr>
+                                      <p:to>
+                                        <p:strVal val="hidden"/>
+                                      </p:to>
+                                    </p:set>
+                                  </p:childTnLst>
+                                </p:cTn>
+                              </p:par>
+                              <p:par>
+                                <p:cTn id="17" presetID="10" presetClass="exit" presetSubtype="0" fill="hold" grpId="0" nodeType="withEffect">
+                                  <p:stCondLst>
+                                    <p:cond delay="1000"/>
+                                  </p:stCondLst>
+                                  <p:childTnLst>
+                                    <p:animEffect transition="out" filter="fade">
+                                      <p:cBhvr>
+                                        <p:cTn id="18" dur="500"/>
+                                        <p:tgtEl>
+                                          <p:spTgt spid="9"/>
+                                        </p:tgtEl>
+                                      </p:cBhvr>
+                                    </p:animEffect>
+                                    <p:set>
+                                      <p:cBhvr>
+                                        <p:cTn id="19" dur="1" fill="hold">
+                                          <p:stCondLst>
+                                            <p:cond delay="499"/>
+                                          </p:stCondLst>
+                                        </p:cTn>
+                                        <p:tgtEl>
+                                          <p:spTgt spid="9"/>
+                                        </p:tgtEl>
+                                        <p:attrNameLst>
+                                          <p:attrName>style.visibility</p:attrName>
+                                        </p:attrNameLst>
+                                      </p:cBhvr>
+                                      <p:to>
+                                        <p:strVal val="hidden"/>
+                                      </p:to>
+                                    </p:set>
+                                  </p:childTnLst>
+                                </p:cTn>
+                              </p:par>
+                              <p:par>
+                                <p:cTn id="20" presetID="10" presetClass="exit" presetSubtype="0" fill="hold" grpId="0" nodeType="withEffect">
+                                  <p:stCondLst>
+                                    <p:cond delay="1000"/>
+                                  </p:stCondLst>
+                                  <p:childTnLst>
+                                    <p:animEffect transition="out" filter="fade">
+                                      <p:cBhvr>
+                                        <p:cTn id="21" dur="500"/>
+                                        <p:tgtEl>
+                                          <p:spTgt spid="10"/>
+                                        </p:tgtEl>
+                                      </p:cBhvr>
+                                    </p:animEffect>
+                                    <p:set>
+                                      <p:cBhvr>
+                                        <p:cTn id="22" dur="1" fill="hold">
+                                          <p:stCondLst>
+                                            <p:cond delay="499"/>
+                                          </p:stCondLst>
+                                        </p:cTn>
+                                        <p:tgtEl>
+                                          <p:spTgt spid="10"/>
+                                        </p:tgtEl>
+                                        <p:attrNameLst>
+                                          <p:attrName>style.visibility</p:attrName>
+                                        </p:attrNameLst>
+                                      </p:cBhvr>
+                                      <p:to>
+                                        <p:strVal val="hidden"/>
+                                      </p:to>
+                                    </p:set>
+                                  </p:childTnLst>
+                                </p:cTn>
+                              </p:par>
+                              <p:par>
+                                <p:cTn id="23" presetID="10" presetClass="exit" presetSubtype="0" fill="hold" grpId="0" nodeType="withEffect">
+                                  <p:stCondLst>
+                                    <p:cond delay="1000"/>
+                                  </p:stCondLst>
+                                  <p:childTnLst>
+                                    <p:animEffect transition="out" filter="fade">
+                                      <p:cBhvr>
+                                        <p:cTn id="24" dur="500"/>
+                                        <p:tgtEl>
+                                          <p:spTgt spid="11"/>
+                                        </p:tgtEl>
+                                      </p:cBhvr>
+                                    </p:animEffect>
+                                    <p:set>
+                                      <p:cBhvr>
+                                        <p:cTn id="25" dur="1" fill="hold">
+                                          <p:stCondLst>
+                                            <p:cond delay="499"/>
+                                          </p:stCondLst>
+                                        </p:cTn>
+                                        <p:tgtEl>
+                                          <p:spTgt spid="11"/>
+                                        </p:tgtEl>
+                                        <p:attrNameLst>
+                                          <p:attrName>style.visibility</p:attrName>
+                                        </p:attrNameLst>
+                                      </p:cBhvr>
+                                      <p:to>
+                                        <p:strVal val="hidden"/>
+                                      </p:to>
+                                    </p:set>
+                                  </p:childTnLst>
+                                </p:cTn>
+                              </p:par>
+                              <p:par>
+                                <p:cTn id="26" presetID="10" presetClass="exit" presetSubtype="0" fill="hold" grpId="0" nodeType="withEffect">
+                                  <p:stCondLst>
+                                    <p:cond delay="1000"/>
+                                  </p:stCondLst>
+                                  <p:childTnLst>
+                                    <p:animEffect transition="out" filter="fade">
+                                      <p:cBhvr>
+                                        <p:cTn id="27" dur="500"/>
+                                        <p:tgtEl>
+                                          <p:spTgt spid="12"/>
+                                        </p:tgtEl>
+                                      </p:cBhvr>
+                                    </p:animEffect>
+                                    <p:set>
+                                      <p:cBhvr>
+                                        <p:cTn id="28" dur="1" fill="hold">
+                                          <p:stCondLst>
+                                            <p:cond delay="499"/>
+                                          </p:stCondLst>
+                                        </p:cTn>
+                                        <p:tgtEl>
+                                          <p:spTgt spid="12"/>
+                                        </p:tgtEl>
+                                        <p:attrNameLst>
+                                          <p:attrName>style.visibility</p:attrName>
+                                        </p:attrNameLst>
+                                      </p:cBhvr>
+                                      <p:to>
+                                        <p:strVal val="hidden"/>
+                                      </p:to>
+                                    </p:set>
+                                  </p:childTnLst>
+                                </p:cTn>
+                              </p:par>
+                            </p:childTnLst>
+                          </p:cTn>
+                        </p:par>
+                      </p:childTnLst>
+                    </p:cTn>
+                  </p:par>
+                </p:childTnLst>
+              </p:cTn>
+              <p:prevCondLst>
+                <p:cond evt="onPrev" delay="0">
+                  <p:tgtEl>
+                    <p:sldTgt/>
+                  </p:tgtEl>
+                </p:cond>
+              </p:prevCondLst>
+              <p:nextCondLst>
+                <p:cond evt="onNext" delay="0">
+                  <p:tgtEl>
+                    <p:sldTgt/>
+                  </p:tgtEl>
+                </p:cond>
+              </p:nextCondLst>
+            </p:seq>
+          </p:childTnLst>
+        </p:cTn>
+      </p:par>
+    </p:tnLst>
+    <p:bldLst>
+      <p:bldP spid="5" grpId="0"/>
+      <p:bldP spid="6" grpId="0"/>
+      <p:bldP spid="7" grpId="0" animBg="1"/>
+      <p:bldP spid="8" grpId="0"/>
+      <p:bldP spid="9" grpId="0"/>
+      <p:bldP spid="10" grpId="0"/>
+      <p:bldP spid="11" grpId="0" animBg="1"/>
+      <p:bldP spid="12" grpId="0"/>
+    </p:bldLst>
+  </p:timing>
+</p:sld>
+</file>
+
+<file path=ppt/slides/slide5.xml><?xml version="1.0" encoding="utf-8"?>
+<p:sld xmlns:a="http://schemas.openxmlformats.org/drawingml/2006/main" xmlns:r="http://schemas.openxmlformats.org/officeDocument/2006/relationships" xmlns:p="http://schemas.openxmlformats.org/presentationml/2006/main">
+  <p:cSld>
+    <p:spTree>
+      <p:nvGrpSpPr>
+        <p:cNvPr id="1" name=""/>
+        <p:cNvGrpSpPr/>
+        <p:nvPr/>
+      </p:nvGrpSpPr>
+      <p:grpSpPr>
+        <a:xfrm>
+          <a:off x="0" y="0"/>
+          <a:ext cx="0" cy="0"/>
+          <a:chOff x="0" y="0"/>
+          <a:chExt cx="0" cy="0"/>
+        </a:xfrm>
+      </p:grpSpPr>
+      <p:sp>
+        <p:nvSpPr>
+          <p:cNvPr id="5" name="1"/>
+          <p:cNvSpPr txBox="1"/>
+          <p:nvPr/>
+        </p:nvSpPr>
+        <p:spPr>
+          <a:xfrm>
+            <a:off x="421268" y="808130"/>
+            <a:ext cx="340158" cy="461665"/>
+          </a:xfrm>
+          <a:prstGeom prst="rect">
+            <a:avLst/>
+          </a:prstGeom>
+          <a:noFill/>
+        </p:spPr>
+        <p:txBody>
+          <a:bodyPr wrap="none" rtlCol="0">
+            <a:spAutoFit/>
+          </a:bodyPr>
+          <a:lstStyle/>
+          <a:p>
+            <a:pPr algn="ctr"/>
+            <a:r>
+              <a:rPr lang="id-ID" sz="2400" dirty="0" smtClean="0"/>
+              <a:t>2</a:t>
+            </a:r>
+            <a:endParaRPr lang="id-ID" sz="2400" dirty="0"/>
+          </a:p>
+        </p:txBody>
+      </p:sp>
+      <p:sp>
+        <p:nvSpPr>
+          <p:cNvPr id="6" name="2"/>
+          <p:cNvSpPr txBox="1"/>
+          <p:nvPr/>
+        </p:nvSpPr>
+        <p:spPr>
+          <a:xfrm>
+            <a:off x="781888" y="604012"/>
+            <a:ext cx="346570" cy="461665"/>
+          </a:xfrm>
+          <a:prstGeom prst="rect">
+            <a:avLst/>
+          </a:prstGeom>
+          <a:noFill/>
+        </p:spPr>
+        <p:txBody>
+          <a:bodyPr wrap="none" rtlCol="0">
+            <a:spAutoFit/>
+          </a:bodyPr>
+          <a:lstStyle/>
+          <a:p>
+            <a:pPr algn="ctr"/>
+            <a:r>
+              <a:rPr lang="id-ID" sz="2400" dirty="0" smtClean="0"/>
+              <a:t>3</a:t>
+            </a:r>
+            <a:endParaRPr lang="id-ID" sz="2400" dirty="0"/>
+          </a:p>
+        </p:txBody>
+      </p:sp>
+      <p:sp>
+        <p:nvSpPr>
+          <p:cNvPr id="7" name="3"/>
+          <p:cNvSpPr/>
+          <p:nvPr/>
+        </p:nvSpPr>
+        <p:spPr>
+          <a:xfrm>
+            <a:off x="748218" y="1068296"/>
+            <a:ext cx="413909" cy="18000"/>
+          </a:xfrm>
+          <a:prstGeom prst="rect">
+            <a:avLst/>
+          </a:prstGeom>
+          <a:solidFill>
+            <a:schemeClr val="tx1"/>
+          </a:solidFill>
+          <a:ln>
+            <a:noFill/>
+          </a:ln>
+        </p:spPr>
+        <p:style>
+          <a:lnRef idx="2">
+            <a:schemeClr val="accent1">
+              <a:shade val="50000"/>
+            </a:schemeClr>
+          </a:lnRef>
+          <a:fillRef idx="1">
+            <a:schemeClr val="accent1"/>
+          </a:fillRef>
+          <a:effectRef idx="0">
+            <a:schemeClr val="accent1"/>
+          </a:effectRef>
+          <a:fontRef idx="minor">
+            <a:schemeClr val="lt1"/>
+          </a:fontRef>
+        </p:style>
+        <p:txBody>
+          <a:bodyPr rtlCol="0" anchor="ctr"/>
+          <a:lstStyle/>
+          <a:p>
+            <a:pPr algn="ctr"/>
+            <a:endParaRPr lang="id-ID" sz="2400"/>
+          </a:p>
+        </p:txBody>
+      </p:sp>
+      <p:sp>
+        <p:nvSpPr>
+          <p:cNvPr id="8" name="4"/>
+          <p:cNvSpPr txBox="1"/>
+          <p:nvPr/>
+        </p:nvSpPr>
+        <p:spPr>
+          <a:xfrm>
+            <a:off x="785094" y="1036060"/>
+            <a:ext cx="340158" cy="461665"/>
+          </a:xfrm>
+          <a:prstGeom prst="rect">
+            <a:avLst/>
+          </a:prstGeom>
+          <a:noFill/>
+        </p:spPr>
+        <p:txBody>
+          <a:bodyPr wrap="none" rtlCol="0">
+            <a:spAutoFit/>
+          </a:bodyPr>
+          <a:lstStyle/>
+          <a:p>
+            <a:pPr algn="ctr"/>
+            <a:r>
+              <a:rPr lang="id-ID" sz="2400" dirty="0" smtClean="0"/>
+              <a:t>5</a:t>
+            </a:r>
+            <a:endParaRPr lang="id-ID" sz="2400" dirty="0"/>
+          </a:p>
+        </p:txBody>
+      </p:sp>
+      <p:sp>
+        <p:nvSpPr>
+          <p:cNvPr id="9" name="5"/>
+          <p:cNvSpPr txBox="1"/>
+          <p:nvPr/>
+        </p:nvSpPr>
+        <p:spPr>
+          <a:xfrm>
+            <a:off x="1358173" y="808130"/>
+            <a:ext cx="338555" cy="461665"/>
+          </a:xfrm>
+          <a:prstGeom prst="rect">
+            <a:avLst/>
+          </a:prstGeom>
+          <a:noFill/>
+        </p:spPr>
+        <p:txBody>
+          <a:bodyPr wrap="none" rtlCol="0">
+            <a:spAutoFit/>
+          </a:bodyPr>
+          <a:lstStyle/>
+          <a:p>
+            <a:pPr algn="ctr"/>
+            <a:r>
+              <a:rPr lang="id-ID" sz="2400" dirty="0" smtClean="0"/>
+              <a:t>=</a:t>
+            </a:r>
+            <a:endParaRPr lang="id-ID" sz="2400" dirty="0"/>
+          </a:p>
+        </p:txBody>
+      </p:sp>
+      <p:sp>
+        <p:nvSpPr>
+          <p:cNvPr id="12" name="8"/>
+          <p:cNvSpPr txBox="1"/>
+          <p:nvPr/>
+        </p:nvSpPr>
+        <p:spPr>
+          <a:xfrm>
+            <a:off x="2267331" y="805227"/>
+            <a:ext cx="327334" cy="461665"/>
+          </a:xfrm>
+          <a:prstGeom prst="rect">
+            <a:avLst/>
+          </a:prstGeom>
+          <a:noFill/>
+        </p:spPr>
+        <p:txBody>
+          <a:bodyPr wrap="none" rtlCol="0">
+            <a:spAutoFit/>
+          </a:bodyPr>
+          <a:lstStyle/>
+          <a:p>
+            <a:pPr algn="ctr"/>
+            <a:r>
+              <a:rPr lang="id-ID" sz="2400" dirty="0" smtClean="0"/>
+              <a:t>?</a:t>
+            </a:r>
+            <a:endParaRPr lang="id-ID" sz="2400" dirty="0"/>
+          </a:p>
+        </p:txBody>
+      </p:sp>
+      <p:sp>
+        <p:nvSpPr>
+          <p:cNvPr id="10" name="2"/>
+          <p:cNvSpPr txBox="1"/>
+          <p:nvPr/>
+        </p:nvSpPr>
+        <p:spPr>
+          <a:xfrm>
+            <a:off x="0" y="0"/>
+            <a:ext cx="1367618" cy="276999"/>
+          </a:xfrm>
+          <a:prstGeom prst="rect">
+            <a:avLst/>
+          </a:prstGeom>
+          <a:solidFill>
+            <a:schemeClr val="tx1"/>
+          </a:solidFill>
+        </p:spPr>
+        <p:txBody>
+          <a:bodyPr wrap="none" rtlCol="0">
+            <a:spAutoFit/>
+          </a:bodyPr>
+          <a:lstStyle/>
+          <a:p>
+            <a:pPr algn="ctr"/>
+            <a:r>
+              <a:rPr lang="id-ID" sz="1200" dirty="0" smtClean="0">
+                <a:solidFill>
+                  <a:schemeClr val="bg1"/>
+                </a:solidFill>
+              </a:rPr>
+              <a:t>Campuran ke Biasa</a:t>
+            </a:r>
+            <a:endParaRPr lang="id-ID" sz="1200" dirty="0">
+              <a:solidFill>
+                <a:schemeClr val="bg1"/>
+              </a:solidFill>
+            </a:endParaRPr>
+          </a:p>
+        </p:txBody>
+      </p:sp>
+    </p:spTree>
+    <p:extLst>
+      <p:ext uri="{BB962C8B-B14F-4D97-AF65-F5344CB8AC3E}">
+        <p14:creationId xmlns:p14="http://schemas.microsoft.com/office/powerpoint/2010/main" val="327196336"/>
+      </p:ext>
+    </p:extLst>
+  </p:cSld>
+  <p:clrMapOvr>
+    <a:masterClrMapping/>
+  </p:clrMapOvr>
+  <mc:AlternateContent xmlns:mc="http://schemas.openxmlformats.org/markup-compatibility/2006" xmlns:p14="http://schemas.microsoft.com/office/powerpoint/2010/main">
+    <mc:Choice Requires="p14">
+      <p:transition spd="slow" p14:dur="2000" advClick="0" advTm="0"/>
+    </mc:Choice>
+    <mc:Fallback xmlns="">
+      <p:transition spd="slow" advClick="0" advTm="0"/>
+    </mc:Fallback>
+  </mc:AlternateContent>
+  <p:timing>
+    <p:tnLst>
+      <p:par>
+        <p:cTn id="1" dur="indefinite" restart="never" nodeType="tmRoot">
+          <p:childTnLst>
+            <p:seq concurrent="1" nextAc="seek">
+              <p:cTn id="2" dur="indefinite" nodeType="mainSeq">
+                <p:childTnLst>
+                  <p:par>
+                    <p:cTn id="3" fill="hold">
+                      <p:stCondLst>
+                        <p:cond delay="indefinite"/>
+                        <p:cond evt="onBegin" delay="0">
+                          <p:tn val="2"/>
+                        </p:cond>
+                      </p:stCondLst>
+                      <p:childTnLst>
+                        <p:par>
+                          <p:cTn id="4" fill="hold">
+                            <p:stCondLst>
+                              <p:cond delay="0"/>
+                            </p:stCondLst>
+                            <p:childTnLst>
+                              <p:par>
+                                <p:cTn id="5" presetID="10" presetClass="entr" presetSubtype="0" fill="hold" grpId="1" nodeType="withEffect">
+                                  <p:stCondLst>
+                                    <p:cond delay="0"/>
+                                  </p:stCondLst>
+                                  <p:childTnLst>
+                                    <p:set>
+                                      <p:cBhvr>
+                                        <p:cTn id="6" dur="1" fill="hold">
+                                          <p:stCondLst>
+                                            <p:cond delay="0"/>
+                                          </p:stCondLst>
+                                        </p:cTn>
+                                        <p:tgtEl>
+                                          <p:spTgt spid="12"/>
+                                        </p:tgtEl>
+                                        <p:attrNameLst>
+                                          <p:attrName>style.visibility</p:attrName>
+                                        </p:attrNameLst>
+                                      </p:cBhvr>
+                                      <p:to>
+                                        <p:strVal val="visible"/>
+                                      </p:to>
+                                    </p:set>
+                                    <p:animEffect transition="in" filter="fade">
+                                      <p:cBhvr>
+                                        <p:cTn id="7" dur="500"/>
+                                        <p:tgtEl>
+                                          <p:spTgt spid="12"/>
+                                        </p:tgtEl>
+                                      </p:cBhvr>
+                                    </p:animEffect>
+                                  </p:childTnLst>
+                                </p:cTn>
+                              </p:par>
+                              <p:par>
+                                <p:cTn id="8" presetID="10" presetClass="entr" presetSubtype="0" fill="hold" grpId="0" nodeType="withEffect">
+                                  <p:stCondLst>
+                                    <p:cond delay="0"/>
+                                  </p:stCondLst>
+                                  <p:childTnLst>
+                                    <p:set>
+                                      <p:cBhvr>
+                                        <p:cTn id="9" dur="1" fill="hold">
+                                          <p:stCondLst>
+                                            <p:cond delay="0"/>
+                                          </p:stCondLst>
+                                        </p:cTn>
+                                        <p:tgtEl>
+                                          <p:spTgt spid="5"/>
+                                        </p:tgtEl>
+                                        <p:attrNameLst>
+                                          <p:attrName>style.visibility</p:attrName>
+                                        </p:attrNameLst>
+                                      </p:cBhvr>
+                                      <p:to>
+                                        <p:strVal val="visible"/>
+                                      </p:to>
+                                    </p:set>
+                                    <p:animEffect transition="in" filter="fade">
+                                      <p:cBhvr>
+                                        <p:cTn id="10" dur="500"/>
+                                        <p:tgtEl>
+                                          <p:spTgt spid="5"/>
+                                        </p:tgtEl>
+                                      </p:cBhvr>
+                                    </p:animEffect>
+                                  </p:childTnLst>
+                                </p:cTn>
+                              </p:par>
+                              <p:par>
+                                <p:cTn id="11" presetID="10" presetClass="entr" presetSubtype="0" fill="hold" grpId="0" nodeType="withEffect">
+                                  <p:stCondLst>
+                                    <p:cond delay="0"/>
+                                  </p:stCondLst>
+                                  <p:childTnLst>
+                                    <p:set>
+                                      <p:cBhvr>
+                                        <p:cTn id="12" dur="1" fill="hold">
+                                          <p:stCondLst>
+                                            <p:cond delay="0"/>
+                                          </p:stCondLst>
+                                        </p:cTn>
+                                        <p:tgtEl>
+                                          <p:spTgt spid="6"/>
+                                        </p:tgtEl>
+                                        <p:attrNameLst>
+                                          <p:attrName>style.visibility</p:attrName>
+                                        </p:attrNameLst>
+                                      </p:cBhvr>
+                                      <p:to>
+                                        <p:strVal val="visible"/>
+                                      </p:to>
+                                    </p:set>
+                                    <p:animEffect transition="in" filter="fade">
+                                      <p:cBhvr>
+                                        <p:cTn id="13" dur="500"/>
+                                        <p:tgtEl>
+                                          <p:spTgt spid="6"/>
+                                        </p:tgtEl>
+                                      </p:cBhvr>
+                                    </p:animEffect>
+                                  </p:childTnLst>
+                                </p:cTn>
+                              </p:par>
+                              <p:par>
+                                <p:cTn id="14" presetID="10" presetClass="entr" presetSubtype="0" fill="hold" grpId="0" nodeType="withEffect">
+                                  <p:stCondLst>
+                                    <p:cond delay="0"/>
+                                  </p:stCondLst>
+                                  <p:childTnLst>
+                                    <p:set>
+                                      <p:cBhvr>
+                                        <p:cTn id="15" dur="1" fill="hold">
+                                          <p:stCondLst>
+                                            <p:cond delay="0"/>
+                                          </p:stCondLst>
+                                        </p:cTn>
+                                        <p:tgtEl>
+                                          <p:spTgt spid="7"/>
+                                        </p:tgtEl>
+                                        <p:attrNameLst>
+                                          <p:attrName>style.visibility</p:attrName>
+                                        </p:attrNameLst>
+                                      </p:cBhvr>
+                                      <p:to>
+                                        <p:strVal val="visible"/>
+                                      </p:to>
+                                    </p:set>
+                                    <p:animEffect transition="in" filter="fade">
+                                      <p:cBhvr>
+                                        <p:cTn id="16" dur="500"/>
+                                        <p:tgtEl>
+                                          <p:spTgt spid="7"/>
+                                        </p:tgtEl>
+                                      </p:cBhvr>
+                                    </p:animEffect>
+                                  </p:childTnLst>
+                                </p:cTn>
+                              </p:par>
+                              <p:par>
+                                <p:cTn id="17" presetID="10" presetClass="entr" presetSubtype="0" fill="hold" grpId="0" nodeType="withEffect">
+                                  <p:stCondLst>
+                                    <p:cond delay="0"/>
+                                  </p:stCondLst>
+                                  <p:childTnLst>
+                                    <p:set>
+                                      <p:cBhvr>
+                                        <p:cTn id="18" dur="1" fill="hold">
+                                          <p:stCondLst>
+                                            <p:cond delay="0"/>
+                                          </p:stCondLst>
+                                        </p:cTn>
+                                        <p:tgtEl>
+                                          <p:spTgt spid="8"/>
+                                        </p:tgtEl>
+                                        <p:attrNameLst>
+                                          <p:attrName>style.visibility</p:attrName>
+                                        </p:attrNameLst>
+                                      </p:cBhvr>
+                                      <p:to>
+                                        <p:strVal val="visible"/>
+                                      </p:to>
+                                    </p:set>
+                                    <p:animEffect transition="in" filter="fade">
+                                      <p:cBhvr>
+                                        <p:cTn id="19" dur="500"/>
+                                        <p:tgtEl>
+                                          <p:spTgt spid="8"/>
+                                        </p:tgtEl>
+                                      </p:cBhvr>
+                                    </p:animEffect>
+                                  </p:childTnLst>
+                                </p:cTn>
+                              </p:par>
+                              <p:par>
+                                <p:cTn id="20" presetID="10" presetClass="entr" presetSubtype="0" fill="hold" grpId="0" nodeType="withEffect">
+                                  <p:stCondLst>
+                                    <p:cond delay="0"/>
+                                  </p:stCondLst>
+                                  <p:childTnLst>
+                                    <p:set>
+                                      <p:cBhvr>
+                                        <p:cTn id="21" dur="1" fill="hold">
+                                          <p:stCondLst>
+                                            <p:cond delay="0"/>
+                                          </p:stCondLst>
+                                        </p:cTn>
+                                        <p:tgtEl>
+                                          <p:spTgt spid="9"/>
+                                        </p:tgtEl>
+                                        <p:attrNameLst>
+                                          <p:attrName>style.visibility</p:attrName>
+                                        </p:attrNameLst>
+                                      </p:cBhvr>
+                                      <p:to>
+                                        <p:strVal val="visible"/>
+                                      </p:to>
+                                    </p:set>
+                                    <p:animEffect transition="in" filter="fade">
+                                      <p:cBhvr>
+                                        <p:cTn id="22" dur="500"/>
+                                        <p:tgtEl>
+                                          <p:spTgt spid="9"/>
+                                        </p:tgtEl>
+                                      </p:cBhvr>
+                                    </p:animEffect>
+                                  </p:childTnLst>
+                                </p:cTn>
+                              </p:par>
+                              <p:par>
+                                <p:cTn id="23" presetID="10" presetClass="exit" presetSubtype="0" fill="hold" grpId="0" nodeType="withEffect">
+                                  <p:stCondLst>
+                                    <p:cond delay="1000"/>
+                                  </p:stCondLst>
+                                  <p:childTnLst>
+                                    <p:animEffect transition="out" filter="fade">
+                                      <p:cBhvr>
+                                        <p:cTn id="24" dur="500"/>
+                                        <p:tgtEl>
+                                          <p:spTgt spid="12"/>
+                                        </p:tgtEl>
+                                      </p:cBhvr>
+                                    </p:animEffect>
+                                    <p:set>
+                                      <p:cBhvr>
+                                        <p:cTn id="25" dur="1" fill="hold">
+                                          <p:stCondLst>
+                                            <p:cond delay="499"/>
+                                          </p:stCondLst>
+                                        </p:cTn>
+                                        <p:tgtEl>
+                                          <p:spTgt spid="12"/>
+                                        </p:tgtEl>
+                                        <p:attrNameLst>
+                                          <p:attrName>style.visibility</p:attrName>
+                                        </p:attrNameLst>
+                                      </p:cBhvr>
+                                      <p:to>
+                                        <p:strVal val="hidden"/>
+                                      </p:to>
+                                    </p:set>
+                                  </p:childTnLst>
+                                </p:cTn>
+                              </p:par>
+                            </p:childTnLst>
+                          </p:cTn>
+                        </p:par>
+                      </p:childTnLst>
+                    </p:cTn>
+                  </p:par>
+                </p:childTnLst>
+              </p:cTn>
+              <p:prevCondLst>
+                <p:cond evt="onPrev" delay="0">
+                  <p:tgtEl>
+                    <p:sldTgt/>
+                  </p:tgtEl>
+                </p:cond>
+              </p:prevCondLst>
+              <p:nextCondLst>
+                <p:cond evt="onNext" delay="0">
+                  <p:tgtEl>
+                    <p:sldTgt/>
+                  </p:tgtEl>
+                </p:cond>
+              </p:nextCondLst>
+            </p:seq>
+          </p:childTnLst>
+        </p:cTn>
+      </p:par>
+    </p:tnLst>
+    <p:bldLst>
+      <p:bldP spid="5" grpId="0"/>
+      <p:bldP spid="6" grpId="0"/>
+      <p:bldP spid="7" grpId="0" animBg="1"/>
+      <p:bldP spid="8" grpId="0"/>
+      <p:bldP spid="9" grpId="0"/>
+      <p:bldP spid="12" grpId="0"/>
+      <p:bldP spid="12" grpId="1"/>
+    </p:bldLst>
+  </p:timing>
+</p:sld>
+</file>
+
+<file path=ppt/slides/slide6.xml><?xml version="1.0" encoding="utf-8"?>
+<p:sld xmlns:a="http://schemas.openxmlformats.org/drawingml/2006/main" xmlns:r="http://schemas.openxmlformats.org/officeDocument/2006/relationships" xmlns:p="http://schemas.openxmlformats.org/presentationml/2006/main">
+  <p:cSld>
+    <p:spTree>
+      <p:nvGrpSpPr>
+        <p:cNvPr id="1" name=""/>
+        <p:cNvGrpSpPr/>
+        <p:nvPr/>
+      </p:nvGrpSpPr>
+      <p:grpSpPr>
+        <a:xfrm>
+          <a:off x="0" y="0"/>
+          <a:ext cx="0" cy="0"/>
+          <a:chOff x="0" y="0"/>
+          <a:chExt cx="0" cy="0"/>
+        </a:xfrm>
+      </p:grpSpPr>
+      <p:grpSp>
+        <p:nvGrpSpPr>
+          <p:cNvPr id="2" name="Group 1"/>
+          <p:cNvGrpSpPr/>
+          <p:nvPr/>
+        </p:nvGrpSpPr>
+        <p:grpSpPr>
+          <a:xfrm>
+            <a:off x="421268" y="604012"/>
+            <a:ext cx="740859" cy="893713"/>
+            <a:chOff x="421268" y="604012"/>
+            <a:chExt cx="740859" cy="893713"/>
+          </a:xfrm>
+        </p:grpSpPr>
+        <p:sp>
+          <p:nvSpPr>
+            <p:cNvPr id="5" name="1"/>
+            <p:cNvSpPr txBox="1"/>
+            <p:nvPr/>
+          </p:nvSpPr>
+          <p:spPr>
+            <a:xfrm>
+              <a:off x="421268" y="808130"/>
+              <a:ext cx="340158" cy="461665"/>
+            </a:xfrm>
+            <a:prstGeom prst="rect">
+              <a:avLst/>
+            </a:prstGeom>
+            <a:noFill/>
+          </p:spPr>
+          <p:txBody>
+            <a:bodyPr wrap="none" rtlCol="0">
+              <a:spAutoFit/>
+            </a:bodyPr>
+            <a:lstStyle/>
+            <a:p>
+              <a:pPr algn="ctr"/>
+              <a:r>
+                <a:rPr lang="id-ID" sz="2400" dirty="0" smtClean="0"/>
+                <a:t>2</a:t>
+              </a:r>
+              <a:endParaRPr lang="id-ID" sz="2400" dirty="0"/>
+            </a:p>
+          </p:txBody>
+        </p:sp>
+        <p:sp>
+          <p:nvSpPr>
+            <p:cNvPr id="6" name="2"/>
+            <p:cNvSpPr txBox="1"/>
+            <p:nvPr/>
+          </p:nvSpPr>
+          <p:spPr>
+            <a:xfrm>
+              <a:off x="781888" y="604012"/>
+              <a:ext cx="346570" cy="461665"/>
+            </a:xfrm>
+            <a:prstGeom prst="rect">
+              <a:avLst/>
+            </a:prstGeom>
+            <a:noFill/>
+          </p:spPr>
+          <p:txBody>
+            <a:bodyPr wrap="none" rtlCol="0">
+              <a:spAutoFit/>
+            </a:bodyPr>
+            <a:lstStyle/>
+            <a:p>
+              <a:pPr algn="ctr"/>
+              <a:r>
+                <a:rPr lang="id-ID" sz="2400" dirty="0" smtClean="0"/>
+                <a:t>3</a:t>
+              </a:r>
+              <a:endParaRPr lang="id-ID" sz="2400" dirty="0"/>
+            </a:p>
+          </p:txBody>
+        </p:sp>
+        <p:sp>
+          <p:nvSpPr>
+            <p:cNvPr id="7" name="3"/>
+            <p:cNvSpPr/>
+            <p:nvPr/>
+          </p:nvSpPr>
+          <p:spPr>
+            <a:xfrm>
+              <a:off x="748218" y="1068296"/>
+              <a:ext cx="413909" cy="18000"/>
+            </a:xfrm>
+            <a:prstGeom prst="rect">
+              <a:avLst/>
+            </a:prstGeom>
+            <a:solidFill>
+              <a:schemeClr val="tx1"/>
+            </a:solidFill>
+            <a:ln>
+              <a:noFill/>
+            </a:ln>
+          </p:spPr>
+          <p:style>
+            <a:lnRef idx="2">
+              <a:schemeClr val="accent1">
+                <a:shade val="50000"/>
+              </a:schemeClr>
+            </a:lnRef>
+            <a:fillRef idx="1">
+              <a:schemeClr val="accent1"/>
+            </a:fillRef>
+            <a:effectRef idx="0">
+              <a:schemeClr val="accent1"/>
+            </a:effectRef>
+            <a:fontRef idx="minor">
+              <a:schemeClr val="lt1"/>
+            </a:fontRef>
+          </p:style>
+          <p:txBody>
+            <a:bodyPr rtlCol="0" anchor="ctr"/>
+            <a:lstStyle/>
+            <a:p>
+              <a:pPr algn="ctr"/>
+              <a:endParaRPr lang="id-ID" sz="2400"/>
+            </a:p>
+          </p:txBody>
+        </p:sp>
+        <p:sp>
+          <p:nvSpPr>
+            <p:cNvPr id="8" name="4"/>
+            <p:cNvSpPr txBox="1"/>
+            <p:nvPr/>
+          </p:nvSpPr>
+          <p:spPr>
+            <a:xfrm>
+              <a:off x="785094" y="1036060"/>
+              <a:ext cx="340158" cy="461665"/>
+            </a:xfrm>
+            <a:prstGeom prst="rect">
+              <a:avLst/>
+            </a:prstGeom>
+            <a:noFill/>
+          </p:spPr>
+          <p:txBody>
+            <a:bodyPr wrap="none" rtlCol="0">
+              <a:spAutoFit/>
+            </a:bodyPr>
+            <a:lstStyle/>
+            <a:p>
+              <a:pPr algn="ctr"/>
+              <a:r>
+                <a:rPr lang="id-ID" sz="2400" dirty="0" smtClean="0"/>
+                <a:t>5</a:t>
+              </a:r>
+              <a:endParaRPr lang="id-ID" sz="2400" dirty="0"/>
+            </a:p>
+          </p:txBody>
+        </p:sp>
+      </p:grpSp>
+      <p:sp>
+        <p:nvSpPr>
+          <p:cNvPr id="9" name="5"/>
+          <p:cNvSpPr txBox="1"/>
+          <p:nvPr/>
+        </p:nvSpPr>
+        <p:spPr>
+          <a:xfrm>
+            <a:off x="1358173" y="808130"/>
+            <a:ext cx="338555" cy="461665"/>
+          </a:xfrm>
+          <a:prstGeom prst="rect">
+            <a:avLst/>
+          </a:prstGeom>
+          <a:noFill/>
+        </p:spPr>
+        <p:txBody>
+          <a:bodyPr wrap="none" rtlCol="0">
+            <a:spAutoFit/>
+          </a:bodyPr>
+          <a:lstStyle/>
+          <a:p>
+            <a:pPr algn="ctr"/>
+            <a:r>
+              <a:rPr lang="id-ID" sz="2400" dirty="0" smtClean="0"/>
+              <a:t>=</a:t>
+            </a:r>
+            <a:endParaRPr lang="id-ID" sz="2400" dirty="0"/>
+          </a:p>
+        </p:txBody>
+      </p:sp>
+      <p:grpSp>
+        <p:nvGrpSpPr>
+          <p:cNvPr id="13" name="Group 12"/>
+          <p:cNvGrpSpPr/>
+          <p:nvPr/>
+        </p:nvGrpSpPr>
+        <p:grpSpPr>
+          <a:xfrm>
+            <a:off x="1896271" y="604012"/>
+            <a:ext cx="740859" cy="893713"/>
+            <a:chOff x="421268" y="604012"/>
+            <a:chExt cx="740859" cy="893713"/>
+          </a:xfrm>
+        </p:grpSpPr>
+        <p:sp>
+          <p:nvSpPr>
+            <p:cNvPr id="14" name="1"/>
+            <p:cNvSpPr txBox="1"/>
+            <p:nvPr/>
+          </p:nvSpPr>
+          <p:spPr>
+            <a:xfrm>
+              <a:off x="421268" y="808130"/>
+              <a:ext cx="340158" cy="461665"/>
+            </a:xfrm>
+            <a:prstGeom prst="rect">
+              <a:avLst/>
+            </a:prstGeom>
+            <a:noFill/>
+          </p:spPr>
+          <p:txBody>
+            <a:bodyPr wrap="none" rtlCol="0">
+              <a:spAutoFit/>
+            </a:bodyPr>
+            <a:lstStyle/>
+            <a:p>
+              <a:pPr algn="ctr"/>
+              <a:r>
+                <a:rPr lang="id-ID" sz="2400" dirty="0" smtClean="0"/>
+                <a:t>2</a:t>
+              </a:r>
+              <a:endParaRPr lang="id-ID" sz="2400" dirty="0"/>
+            </a:p>
+          </p:txBody>
+        </p:sp>
+        <p:sp>
+          <p:nvSpPr>
+            <p:cNvPr id="15" name="2"/>
+            <p:cNvSpPr txBox="1"/>
+            <p:nvPr/>
+          </p:nvSpPr>
+          <p:spPr>
+            <a:xfrm>
+              <a:off x="781888" y="604012"/>
+              <a:ext cx="346570" cy="461665"/>
+            </a:xfrm>
+            <a:prstGeom prst="rect">
+              <a:avLst/>
+            </a:prstGeom>
+            <a:noFill/>
+          </p:spPr>
+          <p:txBody>
+            <a:bodyPr wrap="none" rtlCol="0">
+              <a:spAutoFit/>
+            </a:bodyPr>
+            <a:lstStyle/>
+            <a:p>
+              <a:pPr algn="ctr"/>
+              <a:r>
+                <a:rPr lang="id-ID" sz="2400" dirty="0" smtClean="0"/>
+                <a:t>3</a:t>
+              </a:r>
+              <a:endParaRPr lang="id-ID" sz="2400" dirty="0"/>
+            </a:p>
+          </p:txBody>
+        </p:sp>
+        <p:sp>
+          <p:nvSpPr>
+            <p:cNvPr id="16" name="3"/>
+            <p:cNvSpPr/>
+            <p:nvPr/>
+          </p:nvSpPr>
+          <p:spPr>
+            <a:xfrm>
+              <a:off x="748218" y="1068296"/>
+              <a:ext cx="413909" cy="18000"/>
+            </a:xfrm>
+            <a:prstGeom prst="rect">
+              <a:avLst/>
+            </a:prstGeom>
+            <a:solidFill>
+              <a:schemeClr val="tx1"/>
+            </a:solidFill>
+            <a:ln>
+              <a:noFill/>
+            </a:ln>
+          </p:spPr>
+          <p:style>
+            <a:lnRef idx="2">
+              <a:schemeClr val="accent1">
+                <a:shade val="50000"/>
+              </a:schemeClr>
+            </a:lnRef>
+            <a:fillRef idx="1">
+              <a:schemeClr val="accent1"/>
+            </a:fillRef>
+            <a:effectRef idx="0">
+              <a:schemeClr val="accent1"/>
+            </a:effectRef>
+            <a:fontRef idx="minor">
+              <a:schemeClr val="lt1"/>
+            </a:fontRef>
+          </p:style>
+          <p:txBody>
+            <a:bodyPr rtlCol="0" anchor="ctr"/>
+            <a:lstStyle/>
+            <a:p>
+              <a:pPr algn="ctr"/>
+              <a:endParaRPr lang="id-ID" sz="2400"/>
+            </a:p>
+          </p:txBody>
+        </p:sp>
+        <p:sp>
+          <p:nvSpPr>
+            <p:cNvPr id="17" name="4"/>
+            <p:cNvSpPr txBox="1"/>
+            <p:nvPr/>
+          </p:nvSpPr>
+          <p:spPr>
+            <a:xfrm>
+              <a:off x="785094" y="1036060"/>
+              <a:ext cx="340158" cy="461665"/>
+            </a:xfrm>
+            <a:prstGeom prst="rect">
+              <a:avLst/>
+            </a:prstGeom>
+            <a:noFill/>
+          </p:spPr>
+          <p:txBody>
+            <a:bodyPr wrap="none" rtlCol="0">
+              <a:spAutoFit/>
+            </a:bodyPr>
+            <a:lstStyle/>
+            <a:p>
+              <a:pPr algn="ctr"/>
+              <a:r>
+                <a:rPr lang="id-ID" sz="2400" dirty="0" smtClean="0"/>
+                <a:t>5</a:t>
+              </a:r>
+              <a:endParaRPr lang="id-ID" sz="2400" dirty="0"/>
+            </a:p>
+          </p:txBody>
+        </p:sp>
+      </p:grpSp>
+      <p:sp>
+        <p:nvSpPr>
+          <p:cNvPr id="18" name="2"/>
+          <p:cNvSpPr txBox="1"/>
+          <p:nvPr/>
+        </p:nvSpPr>
+        <p:spPr>
+          <a:xfrm>
+            <a:off x="0" y="0"/>
+            <a:ext cx="1367618" cy="276999"/>
+          </a:xfrm>
+          <a:prstGeom prst="rect">
+            <a:avLst/>
+          </a:prstGeom>
+          <a:solidFill>
+            <a:schemeClr val="tx1"/>
+          </a:solidFill>
+        </p:spPr>
+        <p:txBody>
+          <a:bodyPr wrap="none" rtlCol="0">
+            <a:spAutoFit/>
+          </a:bodyPr>
+          <a:lstStyle/>
+          <a:p>
+            <a:pPr algn="ctr"/>
+            <a:r>
+              <a:rPr lang="id-ID" sz="1200" dirty="0" smtClean="0">
+                <a:solidFill>
+                  <a:schemeClr val="bg1"/>
+                </a:solidFill>
+              </a:rPr>
+              <a:t>Campuran ke Biasa</a:t>
+            </a:r>
+            <a:endParaRPr lang="id-ID" sz="1200" dirty="0">
+              <a:solidFill>
+                <a:schemeClr val="bg1"/>
+              </a:solidFill>
+            </a:endParaRPr>
+          </a:p>
+        </p:txBody>
+      </p:sp>
+    </p:spTree>
+    <p:extLst>
+      <p:ext uri="{BB962C8B-B14F-4D97-AF65-F5344CB8AC3E}">
+        <p14:creationId xmlns:p14="http://schemas.microsoft.com/office/powerpoint/2010/main" val="1943223574"/>
+      </p:ext>
+    </p:extLst>
+  </p:cSld>
+  <p:clrMapOvr>
+    <a:masterClrMapping/>
+  </p:clrMapOvr>
+  <mc:AlternateContent xmlns:mc="http://schemas.openxmlformats.org/markup-compatibility/2006" xmlns:p14="http://schemas.microsoft.com/office/powerpoint/2010/main">
+    <mc:Choice Requires="p14">
+      <p:transition spd="slow" p14:dur="2000" advClick="0" advTm="0"/>
+    </mc:Choice>
+    <mc:Fallback xmlns="">
+      <p:transition spd="slow" advClick="0" advTm="0"/>
+    </mc:Fallback>
+  </mc:AlternateContent>
+  <p:timing>
+    <p:tnLst>
+      <p:par>
+        <p:cTn id="1" dur="indefinite" restart="never" nodeType="tmRoot">
+          <p:childTnLst>
+            <p:seq concurrent="1" nextAc="seek">
+              <p:cTn id="2" dur="indefinite" nodeType="mainSeq">
+                <p:childTnLst>
+                  <p:par>
+                    <p:cTn id="3" fill="hold">
+                      <p:stCondLst>
+                        <p:cond delay="indefinite"/>
+                        <p:cond evt="onBegin" delay="0">
+                          <p:tn val="2"/>
+                        </p:cond>
+                      </p:stCondLst>
+                      <p:childTnLst>
+                        <p:par>
+                          <p:cTn id="4" fill="hold">
+                            <p:stCondLst>
+                              <p:cond delay="0"/>
+                            </p:stCondLst>
+                            <p:childTnLst>
+                              <p:par>
+                                <p:cTn id="5" presetID="35" presetClass="path" presetSubtype="0" accel="50000" decel="50000" fill="hold" nodeType="withEffect">
+                                  <p:stCondLst>
+                                    <p:cond delay="0"/>
+                                  </p:stCondLst>
+                                  <p:childTnLst>
+                                    <p:animMotion origin="layout" path="M -1.48423E-6 1.07349E-7 L -0.43645 1.07349E-7 " pathEditMode="relative" rAng="0" ptsTypes="AA">
+                                      <p:cBhvr>
+                                        <p:cTn id="6" dur="2000" spd="-100000" fill="hold"/>
+                                        <p:tgtEl>
+                                          <p:spTgt spid="13"/>
+                                        </p:tgtEl>
+                                        <p:attrNameLst>
+                                          <p:attrName>ppt_x</p:attrName>
+                                          <p:attrName>ppt_y</p:attrName>
+                                        </p:attrNameLst>
+                                      </p:cBhvr>
+                                      <p:rCtr x="-21846" y="0"/>
+                                    </p:animMotion>
+                                  </p:childTnLst>
+                                </p:cTn>
+                              </p:par>
+                              <p:par>
+                                <p:cTn id="7" presetID="10" presetClass="entr" presetSubtype="0" fill="hold" nodeType="withEffect">
+                                  <p:stCondLst>
+                                    <p:cond delay="0"/>
+                                  </p:stCondLst>
+                                  <p:childTnLst>
+                                    <p:set>
+                                      <p:cBhvr>
+                                        <p:cTn id="8" dur="1" fill="hold">
+                                          <p:stCondLst>
+                                            <p:cond delay="0"/>
+                                          </p:stCondLst>
+                                        </p:cTn>
+                                        <p:tgtEl>
+                                          <p:spTgt spid="13"/>
+                                        </p:tgtEl>
+                                        <p:attrNameLst>
+                                          <p:attrName>style.visibility</p:attrName>
+                                        </p:attrNameLst>
+                                      </p:cBhvr>
+                                      <p:to>
+                                        <p:strVal val="visible"/>
+                                      </p:to>
+                                    </p:set>
+                                    <p:animEffect transition="in" filter="fade">
+                                      <p:cBhvr>
+                                        <p:cTn id="9" dur="2000"/>
+                                        <p:tgtEl>
+                                          <p:spTgt spid="13"/>
+                                        </p:tgtEl>
+                                      </p:cBhvr>
+                                    </p:animEffect>
+                                  </p:childTnLst>
+                                </p:cTn>
+                              </p:par>
+                            </p:childTnLst>
+                          </p:cTn>
+                        </p:par>
+                      </p:childTnLst>
+                    </p:cTn>
+                  </p:par>
+                </p:childTnLst>
+              </p:cTn>
+              <p:prevCondLst>
+                <p:cond evt="onPrev" delay="0">
+                  <p:tgtEl>
+                    <p:sldTgt/>
+                  </p:tgtEl>
+                </p:cond>
+              </p:prevCondLst>
+              <p:nextCondLst>
+                <p:cond evt="onNext" delay="0">
+                  <p:tgtEl>
+                    <p:sldTgt/>
+                  </p:tgtEl>
+                </p:cond>
+              </p:nextCondLst>
+            </p:seq>
+          </p:childTnLst>
+        </p:cTn>
+      </p:par>
+    </p:tnLst>
+  </p:timing>
+</p:sld>
+</file>
+
+<file path=ppt/slides/slide7.xml><?xml version="1.0" encoding="utf-8"?>
+<p:sld xmlns:a="http://schemas.openxmlformats.org/drawingml/2006/main" xmlns:r="http://schemas.openxmlformats.org/officeDocument/2006/relationships" xmlns:p="http://schemas.openxmlformats.org/presentationml/2006/main">
+  <p:cSld>
+    <p:spTree>
+      <p:nvGrpSpPr>
+        <p:cNvPr id="1" name=""/>
+        <p:cNvGrpSpPr/>
+        <p:nvPr/>
+      </p:nvGrpSpPr>
+      <p:grpSpPr>
+        <a:xfrm>
+          <a:off x="0" y="0"/>
+          <a:ext cx="0" cy="0"/>
+          <a:chOff x="0" y="0"/>
+          <a:chExt cx="0" cy="0"/>
+        </a:xfrm>
+      </p:grpSpPr>
+      <p:grpSp>
+        <p:nvGrpSpPr>
+          <p:cNvPr id="2" name="Group 1"/>
+          <p:cNvGrpSpPr/>
+          <p:nvPr/>
+        </p:nvGrpSpPr>
+        <p:grpSpPr>
+          <a:xfrm>
+            <a:off x="421268" y="604012"/>
+            <a:ext cx="740859" cy="893713"/>
+            <a:chOff x="421268" y="604012"/>
+            <a:chExt cx="740859" cy="893713"/>
+          </a:xfrm>
+        </p:grpSpPr>
+        <p:sp>
+          <p:nvSpPr>
+            <p:cNvPr id="5" name="1"/>
+            <p:cNvSpPr txBox="1"/>
+            <p:nvPr/>
+          </p:nvSpPr>
+          <p:spPr>
+            <a:xfrm>
+              <a:off x="421268" y="808130"/>
+              <a:ext cx="340158" cy="461665"/>
+            </a:xfrm>
+            <a:prstGeom prst="rect">
+              <a:avLst/>
+            </a:prstGeom>
+            <a:noFill/>
+          </p:spPr>
+          <p:txBody>
+            <a:bodyPr wrap="none" rtlCol="0">
+              <a:spAutoFit/>
+            </a:bodyPr>
+            <a:lstStyle/>
+            <a:p>
+              <a:pPr algn="ctr"/>
+              <a:r>
+                <a:rPr lang="id-ID" sz="2400" dirty="0" smtClean="0"/>
+                <a:t>2</a:t>
+              </a:r>
+              <a:endParaRPr lang="id-ID" sz="2400" dirty="0"/>
+            </a:p>
+          </p:txBody>
+        </p:sp>
+        <p:sp>
+          <p:nvSpPr>
+            <p:cNvPr id="6" name="2"/>
+            <p:cNvSpPr txBox="1"/>
+            <p:nvPr/>
+          </p:nvSpPr>
+          <p:spPr>
+            <a:xfrm>
+              <a:off x="781888" y="604012"/>
+              <a:ext cx="346570" cy="461665"/>
+            </a:xfrm>
+            <a:prstGeom prst="rect">
+              <a:avLst/>
+            </a:prstGeom>
+            <a:noFill/>
+          </p:spPr>
+          <p:txBody>
+            <a:bodyPr wrap="none" rtlCol="0">
+              <a:spAutoFit/>
+            </a:bodyPr>
+            <a:lstStyle/>
+            <a:p>
+              <a:pPr algn="ctr"/>
+              <a:r>
+                <a:rPr lang="id-ID" sz="2400" dirty="0" smtClean="0"/>
+                <a:t>3</a:t>
+              </a:r>
+              <a:endParaRPr lang="id-ID" sz="2400" dirty="0"/>
+            </a:p>
+          </p:txBody>
+        </p:sp>
+        <p:sp>
+          <p:nvSpPr>
+            <p:cNvPr id="7" name="3"/>
+            <p:cNvSpPr/>
+            <p:nvPr/>
+          </p:nvSpPr>
+          <p:spPr>
+            <a:xfrm>
+              <a:off x="748218" y="1068296"/>
+              <a:ext cx="413909" cy="18000"/>
+            </a:xfrm>
+            <a:prstGeom prst="rect">
+              <a:avLst/>
+            </a:prstGeom>
+            <a:solidFill>
+              <a:schemeClr val="tx1"/>
+            </a:solidFill>
+            <a:ln>
+              <a:noFill/>
+            </a:ln>
+          </p:spPr>
+          <p:style>
+            <a:lnRef idx="2">
+              <a:schemeClr val="accent1">
+                <a:shade val="50000"/>
+              </a:schemeClr>
+            </a:lnRef>
+            <a:fillRef idx="1">
+              <a:schemeClr val="accent1"/>
+            </a:fillRef>
+            <a:effectRef idx="0">
+              <a:schemeClr val="accent1"/>
+            </a:effectRef>
+            <a:fontRef idx="minor">
+              <a:schemeClr val="lt1"/>
+            </a:fontRef>
+          </p:style>
+          <p:txBody>
+            <a:bodyPr rtlCol="0" anchor="ctr"/>
+            <a:lstStyle/>
+            <a:p>
+              <a:pPr algn="ctr"/>
+              <a:endParaRPr lang="id-ID" sz="2400"/>
+            </a:p>
+          </p:txBody>
+        </p:sp>
+        <p:sp>
+          <p:nvSpPr>
+            <p:cNvPr id="8" name="4"/>
+            <p:cNvSpPr txBox="1"/>
+            <p:nvPr/>
+          </p:nvSpPr>
+          <p:spPr>
+            <a:xfrm>
+              <a:off x="785094" y="1036060"/>
+              <a:ext cx="340158" cy="461665"/>
+            </a:xfrm>
+            <a:prstGeom prst="rect">
+              <a:avLst/>
+            </a:prstGeom>
+            <a:noFill/>
+          </p:spPr>
+          <p:txBody>
+            <a:bodyPr wrap="none" rtlCol="0">
+              <a:spAutoFit/>
+            </a:bodyPr>
+            <a:lstStyle/>
+            <a:p>
+              <a:pPr algn="ctr"/>
+              <a:r>
+                <a:rPr lang="id-ID" sz="2400" dirty="0" smtClean="0"/>
+                <a:t>5</a:t>
+              </a:r>
+              <a:endParaRPr lang="id-ID" sz="2400" dirty="0"/>
+            </a:p>
+          </p:txBody>
+        </p:sp>
+      </p:grpSp>
+      <p:sp>
+        <p:nvSpPr>
+          <p:cNvPr id="9" name="="/>
+          <p:cNvSpPr txBox="1"/>
+          <p:nvPr/>
+        </p:nvSpPr>
+        <p:spPr>
+          <a:xfrm>
+            <a:off x="1358173" y="808130"/>
+            <a:ext cx="338555" cy="461665"/>
+          </a:xfrm>
+          <a:prstGeom prst="rect">
+            <a:avLst/>
+          </a:prstGeom>
+          <a:noFill/>
+        </p:spPr>
+        <p:txBody>
+          <a:bodyPr wrap="none" rtlCol="0">
+            <a:spAutoFit/>
+          </a:bodyPr>
+          <a:lstStyle/>
+          <a:p>
+            <a:pPr algn="ctr"/>
+            <a:r>
+              <a:rPr lang="id-ID" sz="2400" dirty="0" smtClean="0"/>
+              <a:t>=</a:t>
+            </a:r>
+            <a:endParaRPr lang="id-ID" sz="2400" dirty="0"/>
+          </a:p>
+        </p:txBody>
+      </p:sp>
+      <p:sp>
+        <p:nvSpPr>
+          <p:cNvPr id="14" name="a"/>
+          <p:cNvSpPr txBox="1"/>
+          <p:nvPr/>
+        </p:nvSpPr>
+        <p:spPr>
+          <a:xfrm>
+            <a:off x="1896271" y="808130"/>
+            <a:ext cx="340158" cy="461665"/>
+          </a:xfrm>
+          <a:prstGeom prst="rect">
+            <a:avLst/>
+          </a:prstGeom>
+          <a:noFill/>
+        </p:spPr>
+        <p:txBody>
+          <a:bodyPr wrap="none" rtlCol="0">
+            <a:spAutoFit/>
+          </a:bodyPr>
+          <a:lstStyle/>
+          <a:p>
+            <a:pPr algn="ctr"/>
+            <a:r>
+              <a:rPr lang="id-ID" sz="2400" dirty="0" smtClean="0"/>
+              <a:t>2</a:t>
+            </a:r>
+            <a:endParaRPr lang="id-ID" sz="2400" dirty="0"/>
+          </a:p>
+        </p:txBody>
+      </p:sp>
+      <p:sp>
+        <p:nvSpPr>
+          <p:cNvPr id="15" name="b"/>
+          <p:cNvSpPr txBox="1"/>
+          <p:nvPr/>
+        </p:nvSpPr>
+        <p:spPr>
+          <a:xfrm>
+            <a:off x="2256891" y="604012"/>
+            <a:ext cx="346570" cy="461665"/>
+          </a:xfrm>
+          <a:prstGeom prst="rect">
+            <a:avLst/>
+          </a:prstGeom>
+          <a:noFill/>
+        </p:spPr>
+        <p:txBody>
+          <a:bodyPr wrap="none" rtlCol="0">
+            <a:spAutoFit/>
+          </a:bodyPr>
+          <a:lstStyle/>
+          <a:p>
+            <a:pPr algn="ctr"/>
+            <a:r>
+              <a:rPr lang="id-ID" sz="2400" dirty="0" smtClean="0"/>
+              <a:t>3</a:t>
+            </a:r>
+            <a:endParaRPr lang="id-ID" sz="2400" dirty="0"/>
+          </a:p>
+        </p:txBody>
+      </p:sp>
+      <p:sp>
+        <p:nvSpPr>
+          <p:cNvPr id="16" name="---"/>
+          <p:cNvSpPr/>
+          <p:nvPr/>
+        </p:nvSpPr>
+        <p:spPr>
+          <a:xfrm>
+            <a:off x="2223221" y="1068296"/>
+            <a:ext cx="413909" cy="18000"/>
+          </a:xfrm>
+          <a:prstGeom prst="rect">
+            <a:avLst/>
+          </a:prstGeom>
+          <a:solidFill>
+            <a:schemeClr val="tx1"/>
+          </a:solidFill>
+          <a:ln>
+            <a:noFill/>
+          </a:ln>
+        </p:spPr>
+        <p:style>
+          <a:lnRef idx="2">
+            <a:schemeClr val="accent1">
+              <a:shade val="50000"/>
+            </a:schemeClr>
+          </a:lnRef>
+          <a:fillRef idx="1">
+            <a:schemeClr val="accent1"/>
+          </a:fillRef>
+          <a:effectRef idx="0">
+            <a:schemeClr val="accent1"/>
+          </a:effectRef>
+          <a:fontRef idx="minor">
+            <a:schemeClr val="lt1"/>
+          </a:fontRef>
+        </p:style>
+        <p:txBody>
+          <a:bodyPr rtlCol="0" anchor="ctr"/>
+          <a:lstStyle/>
+          <a:p>
+            <a:pPr algn="ctr"/>
+            <a:endParaRPr lang="id-ID" sz="2400"/>
+          </a:p>
+        </p:txBody>
+      </p:sp>
+      <p:sp>
+        <p:nvSpPr>
+          <p:cNvPr id="17" name="c"/>
+          <p:cNvSpPr txBox="1"/>
+          <p:nvPr/>
+        </p:nvSpPr>
+        <p:spPr>
+          <a:xfrm>
+            <a:off x="2260097" y="1036060"/>
+            <a:ext cx="340158" cy="461665"/>
+          </a:xfrm>
+          <a:prstGeom prst="rect">
+            <a:avLst/>
+          </a:prstGeom>
+          <a:noFill/>
+        </p:spPr>
+        <p:txBody>
+          <a:bodyPr wrap="none" rtlCol="0">
+            <a:spAutoFit/>
+          </a:bodyPr>
+          <a:lstStyle/>
+          <a:p>
+            <a:pPr algn="ctr"/>
+            <a:r>
+              <a:rPr lang="id-ID" sz="2400" dirty="0" smtClean="0"/>
+              <a:t>5</a:t>
+            </a:r>
+            <a:endParaRPr lang="id-ID" sz="2400" dirty="0"/>
+          </a:p>
+        </p:txBody>
+      </p:sp>
+      <p:sp>
+        <p:nvSpPr>
+          <p:cNvPr id="18" name="-------"/>
+          <p:cNvSpPr/>
+          <p:nvPr/>
+        </p:nvSpPr>
+        <p:spPr>
+          <a:xfrm>
+            <a:off x="1944998" y="1068296"/>
+            <a:ext cx="972000" cy="18000"/>
+          </a:xfrm>
+          <a:prstGeom prst="rect">
+            <a:avLst/>
+          </a:prstGeom>
+          <a:solidFill>
+            <a:schemeClr val="tx1"/>
+          </a:solidFill>
+          <a:ln>
+            <a:noFill/>
+          </a:ln>
+        </p:spPr>
+        <p:style>
+          <a:lnRef idx="2">
+            <a:schemeClr val="accent1">
+              <a:shade val="50000"/>
+            </a:schemeClr>
+          </a:lnRef>
+          <a:fillRef idx="1">
+            <a:schemeClr val="accent1"/>
+          </a:fillRef>
+          <a:effectRef idx="0">
+            <a:schemeClr val="accent1"/>
+          </a:effectRef>
+          <a:fontRef idx="minor">
+            <a:schemeClr val="lt1"/>
+          </a:fontRef>
+        </p:style>
+        <p:txBody>
+          <a:bodyPr rtlCol="0" anchor="ctr"/>
+          <a:lstStyle/>
+          <a:p>
+            <a:pPr algn="ctr"/>
+            <a:endParaRPr lang="id-ID" sz="2400"/>
+          </a:p>
+        </p:txBody>
+      </p:sp>
+      <p:sp>
+        <p:nvSpPr>
+          <p:cNvPr id="20" name="c"/>
+          <p:cNvSpPr txBox="1"/>
+          <p:nvPr/>
+        </p:nvSpPr>
+        <p:spPr>
+          <a:xfrm>
+            <a:off x="1887454" y="606682"/>
+            <a:ext cx="340158" cy="461665"/>
+          </a:xfrm>
+          <a:prstGeom prst="rect">
+            <a:avLst/>
+          </a:prstGeom>
+          <a:noFill/>
+        </p:spPr>
+        <p:txBody>
+          <a:bodyPr wrap="none" rtlCol="0">
+            <a:spAutoFit/>
+          </a:bodyPr>
+          <a:lstStyle/>
+          <a:p>
+            <a:pPr algn="ctr"/>
+            <a:r>
+              <a:rPr lang="id-ID" sz="2400" dirty="0" smtClean="0"/>
+              <a:t>5</a:t>
+            </a:r>
+            <a:endParaRPr lang="id-ID" sz="2400" dirty="0"/>
+          </a:p>
+        </p:txBody>
+      </p:sp>
+      <p:sp>
+        <p:nvSpPr>
+          <p:cNvPr id="21" name="x"/>
+          <p:cNvSpPr txBox="1"/>
+          <p:nvPr/>
+        </p:nvSpPr>
+        <p:spPr>
+          <a:xfrm>
+            <a:off x="2029110" y="602057"/>
+            <a:ext cx="338555" cy="461665"/>
+          </a:xfrm>
+          <a:prstGeom prst="rect">
+            <a:avLst/>
+          </a:prstGeom>
+          <a:noFill/>
+        </p:spPr>
+        <p:txBody>
+          <a:bodyPr wrap="none" rtlCol="0">
+            <a:spAutoFit/>
+          </a:bodyPr>
+          <a:lstStyle/>
+          <a:p>
+            <a:pPr algn="ctr"/>
+            <a:r>
+              <a:rPr lang="id-ID" sz="2400" dirty="0"/>
+              <a:t>×</a:t>
+            </a:r>
+          </a:p>
+        </p:txBody>
+      </p:sp>
+      <p:sp>
+        <p:nvSpPr>
+          <p:cNvPr id="22" name="+"/>
+          <p:cNvSpPr txBox="1"/>
+          <p:nvPr/>
+        </p:nvSpPr>
+        <p:spPr>
+          <a:xfrm>
+            <a:off x="2397910" y="604131"/>
+            <a:ext cx="338555" cy="461665"/>
+          </a:xfrm>
+          <a:prstGeom prst="rect">
+            <a:avLst/>
+          </a:prstGeom>
+          <a:noFill/>
+        </p:spPr>
+        <p:txBody>
+          <a:bodyPr wrap="none" rtlCol="0">
+            <a:spAutoFit/>
+          </a:bodyPr>
+          <a:lstStyle/>
+          <a:p>
+            <a:pPr algn="ctr"/>
+            <a:r>
+              <a:rPr lang="id-ID" sz="2400" dirty="0" smtClean="0"/>
+              <a:t>+</a:t>
+            </a:r>
+            <a:endParaRPr lang="id-ID" sz="2400" dirty="0"/>
+          </a:p>
+        </p:txBody>
+      </p:sp>
+      <p:sp>
+        <p:nvSpPr>
+          <p:cNvPr id="23" name="a"/>
+          <p:cNvSpPr txBox="1"/>
+          <p:nvPr/>
+        </p:nvSpPr>
+        <p:spPr>
+          <a:xfrm>
+            <a:off x="2172984" y="604173"/>
+            <a:ext cx="340158" cy="461665"/>
+          </a:xfrm>
+          <a:prstGeom prst="rect">
+            <a:avLst/>
+          </a:prstGeom>
+          <a:noFill/>
+        </p:spPr>
+        <p:txBody>
+          <a:bodyPr wrap="none" rtlCol="0">
+            <a:spAutoFit/>
+          </a:bodyPr>
+          <a:lstStyle/>
+          <a:p>
+            <a:pPr algn="ctr"/>
+            <a:r>
+              <a:rPr lang="id-ID" sz="2400" dirty="0" smtClean="0"/>
+              <a:t>2</a:t>
+            </a:r>
+            <a:endParaRPr lang="id-ID" sz="2400" dirty="0"/>
+          </a:p>
+        </p:txBody>
+      </p:sp>
+      <p:sp>
+        <p:nvSpPr>
+          <p:cNvPr id="25" name="b"/>
+          <p:cNvSpPr txBox="1"/>
+          <p:nvPr/>
+        </p:nvSpPr>
+        <p:spPr>
+          <a:xfrm>
+            <a:off x="2613755" y="604012"/>
+            <a:ext cx="346570" cy="461665"/>
+          </a:xfrm>
+          <a:prstGeom prst="rect">
+            <a:avLst/>
+          </a:prstGeom>
+          <a:noFill/>
+        </p:spPr>
+        <p:txBody>
+          <a:bodyPr wrap="none" rtlCol="0">
+            <a:spAutoFit/>
+          </a:bodyPr>
+          <a:lstStyle/>
+          <a:p>
+            <a:pPr algn="ctr"/>
+            <a:r>
+              <a:rPr lang="id-ID" sz="2400" dirty="0" smtClean="0"/>
+              <a:t>3</a:t>
+            </a:r>
+            <a:endParaRPr lang="id-ID" sz="2400" dirty="0"/>
+          </a:p>
+        </p:txBody>
+      </p:sp>
+      <p:sp>
+        <p:nvSpPr>
+          <p:cNvPr id="19" name="2"/>
+          <p:cNvSpPr txBox="1"/>
+          <p:nvPr/>
+        </p:nvSpPr>
+        <p:spPr>
+          <a:xfrm>
+            <a:off x="0" y="0"/>
+            <a:ext cx="1367618" cy="276999"/>
+          </a:xfrm>
+          <a:prstGeom prst="rect">
+            <a:avLst/>
+          </a:prstGeom>
+          <a:solidFill>
+            <a:schemeClr val="tx1"/>
+          </a:solidFill>
+        </p:spPr>
+        <p:txBody>
+          <a:bodyPr wrap="none" rtlCol="0">
+            <a:spAutoFit/>
+          </a:bodyPr>
+          <a:lstStyle/>
+          <a:p>
+            <a:pPr algn="ctr"/>
+            <a:r>
+              <a:rPr lang="id-ID" sz="1200" dirty="0" smtClean="0">
+                <a:solidFill>
+                  <a:schemeClr val="bg1"/>
+                </a:solidFill>
+              </a:rPr>
+              <a:t>Campuran ke Biasa</a:t>
+            </a:r>
+            <a:endParaRPr lang="id-ID" sz="1200" dirty="0">
+              <a:solidFill>
+                <a:schemeClr val="bg1"/>
+              </a:solidFill>
+            </a:endParaRPr>
+          </a:p>
+        </p:txBody>
+      </p:sp>
+    </p:spTree>
+    <p:extLst>
+      <p:ext uri="{BB962C8B-B14F-4D97-AF65-F5344CB8AC3E}">
+        <p14:creationId xmlns:p14="http://schemas.microsoft.com/office/powerpoint/2010/main" val="3970594963"/>
+      </p:ext>
+    </p:extLst>
+  </p:cSld>
+  <p:clrMapOvr>
+    <a:masterClrMapping/>
+  </p:clrMapOvr>
+  <mc:AlternateContent xmlns:mc="http://schemas.openxmlformats.org/markup-compatibility/2006" xmlns:p14="http://schemas.microsoft.com/office/powerpoint/2010/main">
+    <mc:Choice Requires="p14">
+      <p:transition spd="slow" p14:dur="2000" advClick="0" advTm="0"/>
+    </mc:Choice>
+    <mc:Fallback xmlns="">
+      <p:transition spd="slow" advClick="0" advTm="0"/>
+    </mc:Fallback>
+  </mc:AlternateContent>
+  <p:timing>
+    <p:tnLst>
+      <p:par>
+        <p:cTn id="1" dur="indefinite" restart="never" nodeType="tmRoot">
+          <p:childTnLst>
+            <p:seq concurrent="1" nextAc="seek">
+              <p:cTn id="2" dur="indefinite" nodeType="mainSeq">
+                <p:childTnLst>
+                  <p:par>
+                    <p:cTn id="3" fill="hold">
+                      <p:stCondLst>
+                        <p:cond delay="indefinite"/>
+                        <p:cond evt="onBegin" delay="0">
+                          <p:tn val="2"/>
+                        </p:cond>
+                      </p:stCondLst>
+                      <p:childTnLst>
+                        <p:par>
+                          <p:cTn id="4" fill="hold">
+                            <p:stCondLst>
+                              <p:cond delay="0"/>
+                            </p:stCondLst>
+                            <p:childTnLst>
+                              <p:par>
+                                <p:cTn id="5" presetID="53" presetClass="entr" presetSubtype="16" fill="hold" grpId="0" nodeType="withEffect">
+                                  <p:stCondLst>
+                                    <p:cond delay="0"/>
+                                  </p:stCondLst>
+                                  <p:childTnLst>
+                                    <p:set>
+                                      <p:cBhvr>
+                                        <p:cTn id="6" dur="1" fill="hold">
+                                          <p:stCondLst>
+                                            <p:cond delay="0"/>
+                                          </p:stCondLst>
+                                        </p:cTn>
+                                        <p:tgtEl>
+                                          <p:spTgt spid="18"/>
+                                        </p:tgtEl>
+                                        <p:attrNameLst>
+                                          <p:attrName>style.visibility</p:attrName>
+                                        </p:attrNameLst>
+                                      </p:cBhvr>
+                                      <p:to>
+                                        <p:strVal val="visible"/>
+                                      </p:to>
+                                    </p:set>
+                                    <p:anim calcmode="lin" valueType="num">
+                                      <p:cBhvr>
+                                        <p:cTn id="7" dur="2000" fill="hold"/>
+                                        <p:tgtEl>
+                                          <p:spTgt spid="18"/>
+                                        </p:tgtEl>
+                                        <p:attrNameLst>
+                                          <p:attrName>ppt_w</p:attrName>
+                                        </p:attrNameLst>
+                                      </p:cBhvr>
+                                      <p:tavLst>
+                                        <p:tav tm="0">
+                                          <p:val>
+                                            <p:fltVal val="0"/>
+                                          </p:val>
+                                        </p:tav>
+                                        <p:tav tm="100000">
+                                          <p:val>
+                                            <p:strVal val="#ppt_w"/>
+                                          </p:val>
+                                        </p:tav>
+                                      </p:tavLst>
+                                    </p:anim>
+                                    <p:anim calcmode="lin" valueType="num">
+                                      <p:cBhvr>
+                                        <p:cTn id="8" dur="2000" fill="hold"/>
+                                        <p:tgtEl>
+                                          <p:spTgt spid="18"/>
+                                        </p:tgtEl>
+                                        <p:attrNameLst>
+                                          <p:attrName>ppt_h</p:attrName>
+                                        </p:attrNameLst>
+                                      </p:cBhvr>
+                                      <p:tavLst>
+                                        <p:tav tm="0">
+                                          <p:val>
+                                            <p:fltVal val="0"/>
+                                          </p:val>
+                                        </p:tav>
+                                        <p:tav tm="100000">
+                                          <p:val>
+                                            <p:strVal val="#ppt_h"/>
+                                          </p:val>
+                                        </p:tav>
+                                      </p:tavLst>
+                                    </p:anim>
+                                    <p:animEffect transition="in" filter="fade">
+                                      <p:cBhvr>
+                                        <p:cTn id="9" dur="2000"/>
+                                        <p:tgtEl>
+                                          <p:spTgt spid="18"/>
+                                        </p:tgtEl>
+                                      </p:cBhvr>
+                                    </p:animEffect>
+                                  </p:childTnLst>
+                                </p:cTn>
+                              </p:par>
+                              <p:par>
+                                <p:cTn id="10" presetID="1" presetClass="exit" presetSubtype="0" fill="hold" grpId="0" nodeType="withEffect">
+                                  <p:stCondLst>
+                                    <p:cond delay="2000"/>
+                                  </p:stCondLst>
+                                  <p:childTnLst>
+                                    <p:set>
+                                      <p:cBhvr>
+                                        <p:cTn id="11" dur="1" fill="hold">
+                                          <p:stCondLst>
+                                            <p:cond delay="0"/>
+                                          </p:stCondLst>
+                                        </p:cTn>
+                                        <p:tgtEl>
+                                          <p:spTgt spid="16"/>
+                                        </p:tgtEl>
+                                        <p:attrNameLst>
+                                          <p:attrName>style.visibility</p:attrName>
+                                        </p:attrNameLst>
+                                      </p:cBhvr>
+                                      <p:to>
+                                        <p:strVal val="hidden"/>
+                                      </p:to>
+                                    </p:set>
+                                  </p:childTnLst>
+                                </p:cTn>
+                              </p:par>
+                              <p:par>
+                                <p:cTn id="12" presetID="42" presetClass="path" presetSubtype="0" accel="50000" decel="50000" fill="hold" grpId="0" nodeType="withEffect">
+                                  <p:stCondLst>
+                                    <p:cond delay="0"/>
+                                  </p:stCondLst>
+                                  <p:childTnLst>
+                                    <p:animMotion origin="layout" path="M 1.2065E-6 -1.77539E-6 L -0.08306 0.10653 " pathEditMode="relative" rAng="0" ptsTypes="AA">
+                                      <p:cBhvr>
+                                        <p:cTn id="13" dur="2000" spd="-100000" fill="hold"/>
+                                        <p:tgtEl>
+                                          <p:spTgt spid="23"/>
+                                        </p:tgtEl>
+                                        <p:attrNameLst>
+                                          <p:attrName>ppt_x</p:attrName>
+                                          <p:attrName>ppt_y</p:attrName>
+                                        </p:attrNameLst>
+                                      </p:cBhvr>
+                                      <p:rCtr x="-4176" y="5285"/>
+                                    </p:animMotion>
+                                  </p:childTnLst>
+                                </p:cTn>
+                              </p:par>
+                              <p:par>
+                                <p:cTn id="14" presetID="42" presetClass="path" presetSubtype="0" accel="50000" decel="50000" fill="hold" grpId="0" nodeType="withEffect">
+                                  <p:stCondLst>
+                                    <p:cond delay="0"/>
+                                  </p:stCondLst>
+                                  <p:childTnLst>
+                                    <p:animMotion origin="layout" path="M -2.11137E-6 2.46078E-6 L 0.10998 0.22626 " pathEditMode="relative" rAng="0" ptsTypes="AA">
+                                      <p:cBhvr>
+                                        <p:cTn id="15" dur="2000" spd="-100000" fill="hold"/>
+                                        <p:tgtEl>
+                                          <p:spTgt spid="20"/>
+                                        </p:tgtEl>
+                                        <p:attrNameLst>
+                                          <p:attrName>ppt_x</p:attrName>
+                                          <p:attrName>ppt_y</p:attrName>
+                                        </p:attrNameLst>
+                                      </p:cBhvr>
+                                      <p:rCtr x="5476" y="11313"/>
+                                    </p:animMotion>
+                                  </p:childTnLst>
+                                </p:cTn>
+                              </p:par>
+                              <p:par>
+                                <p:cTn id="16" presetID="53" presetClass="entr" presetSubtype="16" fill="hold" grpId="0" nodeType="withEffect">
+                                  <p:stCondLst>
+                                    <p:cond delay="2000"/>
+                                  </p:stCondLst>
+                                  <p:childTnLst>
+                                    <p:set>
+                                      <p:cBhvr>
+                                        <p:cTn id="17" dur="1" fill="hold">
+                                          <p:stCondLst>
+                                            <p:cond delay="0"/>
+                                          </p:stCondLst>
+                                        </p:cTn>
+                                        <p:tgtEl>
+                                          <p:spTgt spid="21"/>
+                                        </p:tgtEl>
+                                        <p:attrNameLst>
+                                          <p:attrName>style.visibility</p:attrName>
+                                        </p:attrNameLst>
+                                      </p:cBhvr>
+                                      <p:to>
+                                        <p:strVal val="visible"/>
+                                      </p:to>
+                                    </p:set>
+                                    <p:anim calcmode="lin" valueType="num">
+                                      <p:cBhvr>
+                                        <p:cTn id="18" dur="500" fill="hold"/>
+                                        <p:tgtEl>
+                                          <p:spTgt spid="21"/>
+                                        </p:tgtEl>
+                                        <p:attrNameLst>
+                                          <p:attrName>ppt_w</p:attrName>
+                                        </p:attrNameLst>
+                                      </p:cBhvr>
+                                      <p:tavLst>
+                                        <p:tav tm="0">
+                                          <p:val>
+                                            <p:fltVal val="0"/>
+                                          </p:val>
+                                        </p:tav>
+                                        <p:tav tm="100000">
+                                          <p:val>
+                                            <p:strVal val="#ppt_w"/>
+                                          </p:val>
+                                        </p:tav>
+                                      </p:tavLst>
+                                    </p:anim>
+                                    <p:anim calcmode="lin" valueType="num">
+                                      <p:cBhvr>
+                                        <p:cTn id="19" dur="500" fill="hold"/>
+                                        <p:tgtEl>
+                                          <p:spTgt spid="21"/>
+                                        </p:tgtEl>
+                                        <p:attrNameLst>
+                                          <p:attrName>ppt_h</p:attrName>
+                                        </p:attrNameLst>
+                                      </p:cBhvr>
+                                      <p:tavLst>
+                                        <p:tav tm="0">
+                                          <p:val>
+                                            <p:fltVal val="0"/>
+                                          </p:val>
+                                        </p:tav>
+                                        <p:tav tm="100000">
+                                          <p:val>
+                                            <p:strVal val="#ppt_h"/>
+                                          </p:val>
+                                        </p:tav>
+                                      </p:tavLst>
+                                    </p:anim>
+                                    <p:animEffect transition="in" filter="fade">
+                                      <p:cBhvr>
+                                        <p:cTn id="20" dur="500"/>
+                                        <p:tgtEl>
+                                          <p:spTgt spid="21"/>
+                                        </p:tgtEl>
+                                      </p:cBhvr>
+                                    </p:animEffect>
+                                  </p:childTnLst>
+                                </p:cTn>
+                              </p:par>
+                              <p:par>
+                                <p:cTn id="21" presetID="35" presetClass="path" presetSubtype="0" accel="50000" decel="50000" fill="hold" grpId="0" nodeType="withEffect">
+                                  <p:stCondLst>
+                                    <p:cond delay="0"/>
+                                  </p:stCondLst>
+                                  <p:childTnLst>
+                                    <p:animMotion origin="layout" path="M 4.84919E-6 3.98844E-6 L -0.10395 3.98844E-6 " pathEditMode="relative" rAng="0" ptsTypes="AA">
+                                      <p:cBhvr>
+                                        <p:cTn id="22" dur="2000" spd="-100000" fill="hold"/>
+                                        <p:tgtEl>
+                                          <p:spTgt spid="25"/>
+                                        </p:tgtEl>
+                                        <p:attrNameLst>
+                                          <p:attrName>ppt_x</p:attrName>
+                                          <p:attrName>ppt_y</p:attrName>
+                                        </p:attrNameLst>
+                                      </p:cBhvr>
+                                      <p:rCtr x="-5197" y="0"/>
+                                    </p:animMotion>
+                                  </p:childTnLst>
+                                </p:cTn>
+                              </p:par>
+                              <p:par>
+                                <p:cTn id="23" presetID="53" presetClass="entr" presetSubtype="16" fill="hold" grpId="0" nodeType="withEffect">
+                                  <p:stCondLst>
+                                    <p:cond delay="2000"/>
+                                  </p:stCondLst>
+                                  <p:childTnLst>
+                                    <p:set>
+                                      <p:cBhvr>
+                                        <p:cTn id="24" dur="1" fill="hold">
+                                          <p:stCondLst>
+                                            <p:cond delay="0"/>
+                                          </p:stCondLst>
+                                        </p:cTn>
+                                        <p:tgtEl>
+                                          <p:spTgt spid="22"/>
+                                        </p:tgtEl>
+                                        <p:attrNameLst>
+                                          <p:attrName>style.visibility</p:attrName>
+                                        </p:attrNameLst>
+                                      </p:cBhvr>
+                                      <p:to>
+                                        <p:strVal val="visible"/>
+                                      </p:to>
+                                    </p:set>
+                                    <p:anim calcmode="lin" valueType="num">
+                                      <p:cBhvr>
+                                        <p:cTn id="25" dur="500" fill="hold"/>
+                                        <p:tgtEl>
+                                          <p:spTgt spid="22"/>
+                                        </p:tgtEl>
+                                        <p:attrNameLst>
+                                          <p:attrName>ppt_w</p:attrName>
+                                        </p:attrNameLst>
+                                      </p:cBhvr>
+                                      <p:tavLst>
+                                        <p:tav tm="0">
+                                          <p:val>
+                                            <p:fltVal val="0"/>
+                                          </p:val>
+                                        </p:tav>
+                                        <p:tav tm="100000">
+                                          <p:val>
+                                            <p:strVal val="#ppt_w"/>
+                                          </p:val>
+                                        </p:tav>
+                                      </p:tavLst>
+                                    </p:anim>
+                                    <p:anim calcmode="lin" valueType="num">
+                                      <p:cBhvr>
+                                        <p:cTn id="26" dur="500" fill="hold"/>
+                                        <p:tgtEl>
+                                          <p:spTgt spid="22"/>
+                                        </p:tgtEl>
+                                        <p:attrNameLst>
+                                          <p:attrName>ppt_h</p:attrName>
+                                        </p:attrNameLst>
+                                      </p:cBhvr>
+                                      <p:tavLst>
+                                        <p:tav tm="0">
+                                          <p:val>
+                                            <p:fltVal val="0"/>
+                                          </p:val>
+                                        </p:tav>
+                                        <p:tav tm="100000">
+                                          <p:val>
+                                            <p:strVal val="#ppt_h"/>
+                                          </p:val>
+                                        </p:tav>
+                                      </p:tavLst>
+                                    </p:anim>
+                                    <p:animEffect transition="in" filter="fade">
+                                      <p:cBhvr>
+                                        <p:cTn id="27" dur="500"/>
+                                        <p:tgtEl>
+                                          <p:spTgt spid="22"/>
+                                        </p:tgtEl>
+                                      </p:cBhvr>
+                                    </p:animEffect>
+                                  </p:childTnLst>
+                                </p:cTn>
+                              </p:par>
+                              <p:par>
+                                <p:cTn id="28" presetID="1" presetClass="exit" presetSubtype="0" fill="hold" grpId="0" nodeType="withEffect">
+                                  <p:stCondLst>
+                                    <p:cond delay="0"/>
+                                  </p:stCondLst>
+                                  <p:childTnLst>
+                                    <p:set>
+                                      <p:cBhvr>
+                                        <p:cTn id="29" dur="1" fill="hold">
+                                          <p:stCondLst>
+                                            <p:cond delay="0"/>
+                                          </p:stCondLst>
+                                        </p:cTn>
+                                        <p:tgtEl>
+                                          <p:spTgt spid="15"/>
+                                        </p:tgtEl>
+                                        <p:attrNameLst>
+                                          <p:attrName>style.visibility</p:attrName>
+                                        </p:attrNameLst>
+                                      </p:cBhvr>
+                                      <p:to>
+                                        <p:strVal val="hidden"/>
+                                      </p:to>
+                                    </p:set>
+                                  </p:childTnLst>
+                                </p:cTn>
+                              </p:par>
+                              <p:par>
+                                <p:cTn id="30" presetID="1" presetClass="exit" presetSubtype="0" fill="hold" grpId="0" nodeType="withEffect">
+                                  <p:stCondLst>
+                                    <p:cond delay="0"/>
+                                  </p:stCondLst>
+                                  <p:childTnLst>
+                                    <p:set>
+                                      <p:cBhvr>
+                                        <p:cTn id="31" dur="1" fill="hold">
+                                          <p:stCondLst>
+                                            <p:cond delay="0"/>
+                                          </p:stCondLst>
+                                        </p:cTn>
+                                        <p:tgtEl>
+                                          <p:spTgt spid="14"/>
+                                        </p:tgtEl>
+                                        <p:attrNameLst>
+                                          <p:attrName>style.visibility</p:attrName>
+                                        </p:attrNameLst>
+                                      </p:cBhvr>
+                                      <p:to>
+                                        <p:strVal val="hidden"/>
+                                      </p:to>
+                                    </p:set>
+                                  </p:childTnLst>
+                                </p:cTn>
+                              </p:par>
+                            </p:childTnLst>
+                          </p:cTn>
+                        </p:par>
+                      </p:childTnLst>
+                    </p:cTn>
+                  </p:par>
+                </p:childTnLst>
+              </p:cTn>
+              <p:prevCondLst>
+                <p:cond evt="onPrev" delay="0">
+                  <p:tgtEl>
+                    <p:sldTgt/>
+                  </p:tgtEl>
+                </p:cond>
+              </p:prevCondLst>
+              <p:nextCondLst>
+                <p:cond evt="onNext" delay="0">
+                  <p:tgtEl>
+                    <p:sldTgt/>
+                  </p:tgtEl>
+                </p:cond>
+              </p:nextCondLst>
+            </p:seq>
+          </p:childTnLst>
+        </p:cTn>
+      </p:par>
+    </p:tnLst>
+    <p:bldLst>
+      <p:bldP spid="14" grpId="0"/>
+      <p:bldP spid="15" grpId="0"/>
+      <p:bldP spid="16" grpId="0" animBg="1"/>
+      <p:bldP spid="18" grpId="0" animBg="1"/>
+      <p:bldP spid="20" grpId="0"/>
+      <p:bldP spid="21" grpId="0"/>
+      <p:bldP spid="22" grpId="0"/>
+      <p:bldP spid="23" grpId="0"/>
+      <p:bldP spid="25" grpId="0"/>
+    </p:bldLst>
+  </p:timing>
+</p:sld>
+</file>
+
+<file path=ppt/slides/slide8.xml><?xml version="1.0" encoding="utf-8"?>
+<p:sld xmlns:a="http://schemas.openxmlformats.org/drawingml/2006/main" xmlns:r="http://schemas.openxmlformats.org/officeDocument/2006/relationships" xmlns:p="http://schemas.openxmlformats.org/presentationml/2006/main">
+  <p:cSld>
+    <p:spTree>
+      <p:nvGrpSpPr>
+        <p:cNvPr id="1" name=""/>
+        <p:cNvGrpSpPr/>
+        <p:nvPr/>
+      </p:nvGrpSpPr>
+      <p:grpSpPr>
+        <a:xfrm>
+          <a:off x="0" y="0"/>
+          <a:ext cx="0" cy="0"/>
+          <a:chOff x="0" y="0"/>
+          <a:chExt cx="0" cy="0"/>
+        </a:xfrm>
+      </p:grpSpPr>
+      <p:sp>
+        <p:nvSpPr>
+          <p:cNvPr id="5" name="1"/>
+          <p:cNvSpPr txBox="1"/>
+          <p:nvPr/>
+        </p:nvSpPr>
+        <p:spPr>
+          <a:xfrm>
+            <a:off x="421268" y="808130"/>
+            <a:ext cx="340158" cy="461665"/>
+          </a:xfrm>
+          <a:prstGeom prst="rect">
+            <a:avLst/>
+          </a:prstGeom>
+          <a:noFill/>
+        </p:spPr>
+        <p:txBody>
+          <a:bodyPr wrap="none" rtlCol="0">
+            <a:spAutoFit/>
+          </a:bodyPr>
+          <a:lstStyle/>
+          <a:p>
+            <a:pPr algn="ctr"/>
+            <a:r>
+              <a:rPr lang="id-ID" sz="2400" dirty="0" smtClean="0"/>
+              <a:t>2</a:t>
+            </a:r>
+            <a:endParaRPr lang="id-ID" sz="2400" dirty="0"/>
+          </a:p>
+        </p:txBody>
+      </p:sp>
+      <p:sp>
+        <p:nvSpPr>
+          <p:cNvPr id="6" name="2"/>
+          <p:cNvSpPr txBox="1"/>
+          <p:nvPr/>
+        </p:nvSpPr>
+        <p:spPr>
+          <a:xfrm>
+            <a:off x="781888" y="604012"/>
+            <a:ext cx="346570" cy="461665"/>
+          </a:xfrm>
+          <a:prstGeom prst="rect">
+            <a:avLst/>
+          </a:prstGeom>
+          <a:noFill/>
+        </p:spPr>
+        <p:txBody>
+          <a:bodyPr wrap="none" rtlCol="0">
+            <a:spAutoFit/>
+          </a:bodyPr>
+          <a:lstStyle/>
+          <a:p>
+            <a:pPr algn="ctr"/>
+            <a:r>
+              <a:rPr lang="id-ID" sz="2400" dirty="0" smtClean="0"/>
+              <a:t>3</a:t>
+            </a:r>
+            <a:endParaRPr lang="id-ID" sz="2400" dirty="0"/>
+          </a:p>
+        </p:txBody>
+      </p:sp>
+      <p:sp>
+        <p:nvSpPr>
+          <p:cNvPr id="7" name="3"/>
+          <p:cNvSpPr/>
+          <p:nvPr/>
+        </p:nvSpPr>
+        <p:spPr>
+          <a:xfrm>
+            <a:off x="748218" y="1068296"/>
+            <a:ext cx="413909" cy="18000"/>
+          </a:xfrm>
+          <a:prstGeom prst="rect">
+            <a:avLst/>
+          </a:prstGeom>
+          <a:solidFill>
+            <a:schemeClr val="tx1"/>
+          </a:solidFill>
+          <a:ln>
+            <a:noFill/>
+          </a:ln>
+        </p:spPr>
+        <p:style>
+          <a:lnRef idx="2">
+            <a:schemeClr val="accent1">
+              <a:shade val="50000"/>
+            </a:schemeClr>
+          </a:lnRef>
+          <a:fillRef idx="1">
+            <a:schemeClr val="accent1"/>
+          </a:fillRef>
+          <a:effectRef idx="0">
+            <a:schemeClr val="accent1"/>
+          </a:effectRef>
+          <a:fontRef idx="minor">
+            <a:schemeClr val="lt1"/>
+          </a:fontRef>
+        </p:style>
+        <p:txBody>
+          <a:bodyPr rtlCol="0" anchor="ctr"/>
+          <a:lstStyle/>
+          <a:p>
+            <a:pPr algn="ctr"/>
+            <a:endParaRPr lang="id-ID" sz="2400"/>
+          </a:p>
+        </p:txBody>
+      </p:sp>
+      <p:sp>
+        <p:nvSpPr>
+          <p:cNvPr id="8" name="4"/>
+          <p:cNvSpPr txBox="1"/>
+          <p:nvPr/>
+        </p:nvSpPr>
+        <p:spPr>
+          <a:xfrm>
+            <a:off x="785094" y="1036060"/>
+            <a:ext cx="340158" cy="461665"/>
+          </a:xfrm>
+          <a:prstGeom prst="rect">
+            <a:avLst/>
+          </a:prstGeom>
+          <a:noFill/>
+        </p:spPr>
+        <p:txBody>
+          <a:bodyPr wrap="none" rtlCol="0">
+            <a:spAutoFit/>
+          </a:bodyPr>
+          <a:lstStyle/>
+          <a:p>
+            <a:pPr algn="ctr"/>
+            <a:r>
+              <a:rPr lang="id-ID" sz="2400" dirty="0" smtClean="0"/>
+              <a:t>5</a:t>
+            </a:r>
+            <a:endParaRPr lang="id-ID" sz="2400" dirty="0"/>
+          </a:p>
+        </p:txBody>
+      </p:sp>
+      <p:sp>
+        <p:nvSpPr>
+          <p:cNvPr id="9" name="5"/>
+          <p:cNvSpPr txBox="1"/>
+          <p:nvPr/>
+        </p:nvSpPr>
+        <p:spPr>
+          <a:xfrm>
+            <a:off x="1358173" y="808130"/>
+            <a:ext cx="338555" cy="461665"/>
+          </a:xfrm>
+          <a:prstGeom prst="rect">
+            <a:avLst/>
+          </a:prstGeom>
+          <a:noFill/>
+        </p:spPr>
+        <p:txBody>
+          <a:bodyPr wrap="none" rtlCol="0">
+            <a:spAutoFit/>
+          </a:bodyPr>
+          <a:lstStyle/>
+          <a:p>
+            <a:pPr algn="ctr"/>
+            <a:r>
+              <a:rPr lang="id-ID" sz="2400" dirty="0" smtClean="0"/>
+              <a:t>=</a:t>
+            </a:r>
+            <a:endParaRPr lang="id-ID" sz="2400" dirty="0"/>
+          </a:p>
+        </p:txBody>
+      </p:sp>
+      <p:sp>
+        <p:nvSpPr>
+          <p:cNvPr id="10" name="6"/>
+          <p:cNvSpPr txBox="1"/>
+          <p:nvPr/>
+        </p:nvSpPr>
+        <p:spPr>
+          <a:xfrm>
+            <a:off x="1883412" y="604012"/>
+            <a:ext cx="1095173" cy="461665"/>
+          </a:xfrm>
+          <a:prstGeom prst="rect">
+            <a:avLst/>
+          </a:prstGeom>
+          <a:noFill/>
+        </p:spPr>
+        <p:txBody>
+          <a:bodyPr wrap="none" rtlCol="0">
+            <a:spAutoFit/>
+          </a:bodyPr>
+          <a:lstStyle/>
+          <a:p>
+            <a:pPr algn="ctr"/>
+            <a:r>
+              <a:rPr lang="id-ID" sz="2400" dirty="0" smtClean="0"/>
+              <a:t>5×2 </a:t>
+            </a:r>
+            <a:r>
+              <a:rPr lang="id-ID" sz="2400" dirty="0" smtClean="0"/>
+              <a:t>+ </a:t>
+            </a:r>
+            <a:r>
+              <a:rPr lang="id-ID" sz="2400" dirty="0" smtClean="0"/>
+              <a:t>3</a:t>
+            </a:r>
+            <a:endParaRPr lang="id-ID" sz="2400" dirty="0"/>
+          </a:p>
+        </p:txBody>
+      </p:sp>
+      <p:sp>
+        <p:nvSpPr>
+          <p:cNvPr id="11" name="7"/>
+          <p:cNvSpPr/>
+          <p:nvPr/>
+        </p:nvSpPr>
+        <p:spPr>
+          <a:xfrm>
+            <a:off x="1944998" y="1068296"/>
+            <a:ext cx="972000" cy="18000"/>
+          </a:xfrm>
+          <a:prstGeom prst="rect">
+            <a:avLst/>
+          </a:prstGeom>
+          <a:solidFill>
+            <a:schemeClr val="tx1"/>
+          </a:solidFill>
+          <a:ln>
+            <a:noFill/>
+          </a:ln>
+        </p:spPr>
+        <p:style>
+          <a:lnRef idx="2">
+            <a:schemeClr val="accent1">
+              <a:shade val="50000"/>
+            </a:schemeClr>
+          </a:lnRef>
+          <a:fillRef idx="1">
+            <a:schemeClr val="accent1"/>
+          </a:fillRef>
+          <a:effectRef idx="0">
+            <a:schemeClr val="accent1"/>
+          </a:effectRef>
+          <a:fontRef idx="minor">
+            <a:schemeClr val="lt1"/>
+          </a:fontRef>
+        </p:style>
+        <p:txBody>
+          <a:bodyPr rtlCol="0" anchor="ctr"/>
+          <a:lstStyle/>
+          <a:p>
+            <a:pPr algn="ctr"/>
+            <a:endParaRPr lang="id-ID" sz="2400"/>
+          </a:p>
+        </p:txBody>
+      </p:sp>
+      <p:sp>
+        <p:nvSpPr>
+          <p:cNvPr id="12" name="8"/>
+          <p:cNvSpPr txBox="1"/>
+          <p:nvPr/>
+        </p:nvSpPr>
+        <p:spPr>
+          <a:xfrm>
+            <a:off x="2260919" y="1036060"/>
+            <a:ext cx="340158" cy="461665"/>
+          </a:xfrm>
+          <a:prstGeom prst="rect">
+            <a:avLst/>
+          </a:prstGeom>
+          <a:noFill/>
+        </p:spPr>
+        <p:txBody>
+          <a:bodyPr wrap="none" rtlCol="0">
+            <a:spAutoFit/>
+          </a:bodyPr>
+          <a:lstStyle/>
+          <a:p>
+            <a:pPr algn="ctr"/>
+            <a:r>
+              <a:rPr lang="id-ID" sz="2400" dirty="0" smtClean="0"/>
+              <a:t>5</a:t>
+            </a:r>
+            <a:endParaRPr lang="id-ID" sz="2400" dirty="0"/>
+          </a:p>
+        </p:txBody>
+      </p:sp>
+      <p:sp>
+        <p:nvSpPr>
+          <p:cNvPr id="13" name="2"/>
+          <p:cNvSpPr txBox="1"/>
+          <p:nvPr/>
+        </p:nvSpPr>
+        <p:spPr>
+          <a:xfrm>
+            <a:off x="0" y="0"/>
+            <a:ext cx="1367618" cy="276999"/>
+          </a:xfrm>
+          <a:prstGeom prst="rect">
+            <a:avLst/>
+          </a:prstGeom>
+          <a:solidFill>
+            <a:schemeClr val="tx1"/>
+          </a:solidFill>
+        </p:spPr>
+        <p:txBody>
+          <a:bodyPr wrap="none" rtlCol="0">
+            <a:spAutoFit/>
+          </a:bodyPr>
+          <a:lstStyle/>
+          <a:p>
+            <a:pPr algn="ctr"/>
+            <a:r>
+              <a:rPr lang="id-ID" sz="1200" dirty="0" smtClean="0">
+                <a:solidFill>
+                  <a:schemeClr val="bg1"/>
+                </a:solidFill>
+              </a:rPr>
+              <a:t>Campuran ke Biasa</a:t>
+            </a:r>
+            <a:endParaRPr lang="id-ID" sz="1200" dirty="0">
+              <a:solidFill>
+                <a:schemeClr val="bg1"/>
+              </a:solidFill>
+            </a:endParaRPr>
+          </a:p>
+        </p:txBody>
+      </p:sp>
+    </p:spTree>
+    <p:extLst>
+      <p:ext uri="{BB962C8B-B14F-4D97-AF65-F5344CB8AC3E}">
+        <p14:creationId xmlns:p14="http://schemas.microsoft.com/office/powerpoint/2010/main" val="3440976325"/>
+      </p:ext>
+    </p:extLst>
+  </p:cSld>
+  <p:clrMapOvr>
+    <a:masterClrMapping/>
+  </p:clrMapOvr>
+  <mc:AlternateContent xmlns:mc="http://schemas.openxmlformats.org/markup-compatibility/2006" xmlns:p14="http://schemas.microsoft.com/office/powerpoint/2010/main">
+    <mc:Choice Requires="p14">
+      <p:transition spd="slow" p14:dur="2000" advClick="0" advTm="0"/>
+    </mc:Choice>
+    <mc:Fallback xmlns="">
+      <p:transition spd="slow" advClick="0" advTm="0"/>
+    </mc:Fallback>
+  </mc:AlternateContent>
+  <p:timing>
+    <p:tnLst>
+      <p:par>
         <p:cTn id="1" dur="indefinite" restart="never" nodeType="tmRoot"/>
       </p:par>
     </p:tnLst>
+  </p:timing>
+</p:sld>
+</file>
+
+<file path=ppt/slides/slide9.xml><?xml version="1.0" encoding="utf-8"?>
+<p:sld xmlns:a="http://schemas.openxmlformats.org/drawingml/2006/main" xmlns:r="http://schemas.openxmlformats.org/officeDocument/2006/relationships" xmlns:p="http://schemas.openxmlformats.org/presentationml/2006/main">
+  <p:cSld>
+    <p:spTree>
+      <p:nvGrpSpPr>
+        <p:cNvPr id="1" name=""/>
+        <p:cNvGrpSpPr/>
+        <p:nvPr/>
+      </p:nvGrpSpPr>
+      <p:grpSpPr>
+        <a:xfrm>
+          <a:off x="0" y="0"/>
+          <a:ext cx="0" cy="0"/>
+          <a:chOff x="0" y="0"/>
+          <a:chExt cx="0" cy="0"/>
+        </a:xfrm>
+      </p:grpSpPr>
+      <p:sp>
+        <p:nvSpPr>
+          <p:cNvPr id="5" name="1"/>
+          <p:cNvSpPr txBox="1"/>
+          <p:nvPr/>
+        </p:nvSpPr>
+        <p:spPr>
+          <a:xfrm>
+            <a:off x="421268" y="808130"/>
+            <a:ext cx="340158" cy="461665"/>
+          </a:xfrm>
+          <a:prstGeom prst="rect">
+            <a:avLst/>
+          </a:prstGeom>
+          <a:noFill/>
+        </p:spPr>
+        <p:txBody>
+          <a:bodyPr wrap="none" rtlCol="0">
+            <a:spAutoFit/>
+          </a:bodyPr>
+          <a:lstStyle/>
+          <a:p>
+            <a:pPr algn="ctr"/>
+            <a:r>
+              <a:rPr lang="id-ID" sz="2400" dirty="0" smtClean="0"/>
+              <a:t>2</a:t>
+            </a:r>
+            <a:endParaRPr lang="id-ID" sz="2400" dirty="0"/>
+          </a:p>
+        </p:txBody>
+      </p:sp>
+      <p:sp>
+        <p:nvSpPr>
+          <p:cNvPr id="6" name="2"/>
+          <p:cNvSpPr txBox="1"/>
+          <p:nvPr/>
+        </p:nvSpPr>
+        <p:spPr>
+          <a:xfrm>
+            <a:off x="781888" y="604012"/>
+            <a:ext cx="346570" cy="461665"/>
+          </a:xfrm>
+          <a:prstGeom prst="rect">
+            <a:avLst/>
+          </a:prstGeom>
+          <a:noFill/>
+        </p:spPr>
+        <p:txBody>
+          <a:bodyPr wrap="none" rtlCol="0">
+            <a:spAutoFit/>
+          </a:bodyPr>
+          <a:lstStyle/>
+          <a:p>
+            <a:pPr algn="ctr"/>
+            <a:r>
+              <a:rPr lang="id-ID" sz="2400" dirty="0" smtClean="0"/>
+              <a:t>3</a:t>
+            </a:r>
+            <a:endParaRPr lang="id-ID" sz="2400" dirty="0"/>
+          </a:p>
+        </p:txBody>
+      </p:sp>
+      <p:sp>
+        <p:nvSpPr>
+          <p:cNvPr id="7" name="3"/>
+          <p:cNvSpPr/>
+          <p:nvPr/>
+        </p:nvSpPr>
+        <p:spPr>
+          <a:xfrm>
+            <a:off x="748218" y="1068296"/>
+            <a:ext cx="413909" cy="18000"/>
+          </a:xfrm>
+          <a:prstGeom prst="rect">
+            <a:avLst/>
+          </a:prstGeom>
+          <a:solidFill>
+            <a:schemeClr val="tx1"/>
+          </a:solidFill>
+          <a:ln>
+            <a:noFill/>
+          </a:ln>
+        </p:spPr>
+        <p:style>
+          <a:lnRef idx="2">
+            <a:schemeClr val="accent1">
+              <a:shade val="50000"/>
+            </a:schemeClr>
+          </a:lnRef>
+          <a:fillRef idx="1">
+            <a:schemeClr val="accent1"/>
+          </a:fillRef>
+          <a:effectRef idx="0">
+            <a:schemeClr val="accent1"/>
+          </a:effectRef>
+          <a:fontRef idx="minor">
+            <a:schemeClr val="lt1"/>
+          </a:fontRef>
+        </p:style>
+        <p:txBody>
+          <a:bodyPr rtlCol="0" anchor="ctr"/>
+          <a:lstStyle/>
+          <a:p>
+            <a:pPr algn="ctr"/>
+            <a:endParaRPr lang="id-ID" sz="2400"/>
+          </a:p>
+        </p:txBody>
+      </p:sp>
+      <p:sp>
+        <p:nvSpPr>
+          <p:cNvPr id="8" name="4"/>
+          <p:cNvSpPr txBox="1"/>
+          <p:nvPr/>
+        </p:nvSpPr>
+        <p:spPr>
+          <a:xfrm>
+            <a:off x="785094" y="1036060"/>
+            <a:ext cx="340158" cy="461665"/>
+          </a:xfrm>
+          <a:prstGeom prst="rect">
+            <a:avLst/>
+          </a:prstGeom>
+          <a:noFill/>
+        </p:spPr>
+        <p:txBody>
+          <a:bodyPr wrap="none" rtlCol="0">
+            <a:spAutoFit/>
+          </a:bodyPr>
+          <a:lstStyle/>
+          <a:p>
+            <a:pPr algn="ctr"/>
+            <a:r>
+              <a:rPr lang="id-ID" sz="2400" dirty="0" smtClean="0"/>
+              <a:t>5</a:t>
+            </a:r>
+            <a:endParaRPr lang="id-ID" sz="2400" dirty="0"/>
+          </a:p>
+        </p:txBody>
+      </p:sp>
+      <p:sp>
+        <p:nvSpPr>
+          <p:cNvPr id="9" name="5"/>
+          <p:cNvSpPr txBox="1"/>
+          <p:nvPr/>
+        </p:nvSpPr>
+        <p:spPr>
+          <a:xfrm>
+            <a:off x="1358173" y="808130"/>
+            <a:ext cx="338555" cy="461665"/>
+          </a:xfrm>
+          <a:prstGeom prst="rect">
+            <a:avLst/>
+          </a:prstGeom>
+          <a:noFill/>
+        </p:spPr>
+        <p:txBody>
+          <a:bodyPr wrap="none" rtlCol="0">
+            <a:spAutoFit/>
+          </a:bodyPr>
+          <a:lstStyle/>
+          <a:p>
+            <a:pPr algn="ctr"/>
+            <a:r>
+              <a:rPr lang="id-ID" sz="2400" dirty="0" smtClean="0"/>
+              <a:t>=</a:t>
+            </a:r>
+            <a:endParaRPr lang="id-ID" sz="2400" dirty="0"/>
+          </a:p>
+        </p:txBody>
+      </p:sp>
+      <p:sp>
+        <p:nvSpPr>
+          <p:cNvPr id="10" name="6"/>
+          <p:cNvSpPr txBox="1"/>
+          <p:nvPr/>
+        </p:nvSpPr>
+        <p:spPr>
+          <a:xfrm>
+            <a:off x="1883412" y="604012"/>
+            <a:ext cx="1095173" cy="461665"/>
+          </a:xfrm>
+          <a:prstGeom prst="rect">
+            <a:avLst/>
+          </a:prstGeom>
+          <a:noFill/>
+        </p:spPr>
+        <p:txBody>
+          <a:bodyPr wrap="none" rtlCol="0">
+            <a:spAutoFit/>
+          </a:bodyPr>
+          <a:lstStyle/>
+          <a:p>
+            <a:pPr algn="ctr"/>
+            <a:r>
+              <a:rPr lang="id-ID" sz="2400" dirty="0" smtClean="0"/>
+              <a:t>5×2 </a:t>
+            </a:r>
+            <a:r>
+              <a:rPr lang="id-ID" sz="2400" dirty="0" smtClean="0"/>
+              <a:t>+ </a:t>
+            </a:r>
+            <a:r>
+              <a:rPr lang="id-ID" sz="2400" dirty="0" smtClean="0"/>
+              <a:t>3</a:t>
+            </a:r>
+            <a:endParaRPr lang="id-ID" sz="2400" dirty="0"/>
+          </a:p>
+        </p:txBody>
+      </p:sp>
+      <p:sp>
+        <p:nvSpPr>
+          <p:cNvPr id="11" name="7"/>
+          <p:cNvSpPr/>
+          <p:nvPr/>
+        </p:nvSpPr>
+        <p:spPr>
+          <a:xfrm>
+            <a:off x="1944998" y="1068296"/>
+            <a:ext cx="972000" cy="18000"/>
+          </a:xfrm>
+          <a:prstGeom prst="rect">
+            <a:avLst/>
+          </a:prstGeom>
+          <a:solidFill>
+            <a:schemeClr val="tx1"/>
+          </a:solidFill>
+          <a:ln>
+            <a:noFill/>
+          </a:ln>
+        </p:spPr>
+        <p:style>
+          <a:lnRef idx="2">
+            <a:schemeClr val="accent1">
+              <a:shade val="50000"/>
+            </a:schemeClr>
+          </a:lnRef>
+          <a:fillRef idx="1">
+            <a:schemeClr val="accent1"/>
+          </a:fillRef>
+          <a:effectRef idx="0">
+            <a:schemeClr val="accent1"/>
+          </a:effectRef>
+          <a:fontRef idx="minor">
+            <a:schemeClr val="lt1"/>
+          </a:fontRef>
+        </p:style>
+        <p:txBody>
+          <a:bodyPr rtlCol="0" anchor="ctr"/>
+          <a:lstStyle/>
+          <a:p>
+            <a:pPr algn="ctr"/>
+            <a:endParaRPr lang="id-ID" sz="2400"/>
+          </a:p>
+        </p:txBody>
+      </p:sp>
+      <p:sp>
+        <p:nvSpPr>
+          <p:cNvPr id="12" name="8"/>
+          <p:cNvSpPr txBox="1"/>
+          <p:nvPr/>
+        </p:nvSpPr>
+        <p:spPr>
+          <a:xfrm>
+            <a:off x="2260919" y="1036060"/>
+            <a:ext cx="340158" cy="461665"/>
+          </a:xfrm>
+          <a:prstGeom prst="rect">
+            <a:avLst/>
+          </a:prstGeom>
+          <a:noFill/>
+        </p:spPr>
+        <p:txBody>
+          <a:bodyPr wrap="none" rtlCol="0">
+            <a:spAutoFit/>
+          </a:bodyPr>
+          <a:lstStyle/>
+          <a:p>
+            <a:pPr algn="ctr"/>
+            <a:r>
+              <a:rPr lang="id-ID" sz="2400" dirty="0" smtClean="0"/>
+              <a:t>5</a:t>
+            </a:r>
+            <a:endParaRPr lang="id-ID" sz="2400" dirty="0"/>
+          </a:p>
+        </p:txBody>
+      </p:sp>
+      <p:sp>
+        <p:nvSpPr>
+          <p:cNvPr id="13" name="2"/>
+          <p:cNvSpPr txBox="1"/>
+          <p:nvPr/>
+        </p:nvSpPr>
+        <p:spPr>
+          <a:xfrm>
+            <a:off x="0" y="0"/>
+            <a:ext cx="1367618" cy="276999"/>
+          </a:xfrm>
+          <a:prstGeom prst="rect">
+            <a:avLst/>
+          </a:prstGeom>
+          <a:solidFill>
+            <a:schemeClr val="tx1"/>
+          </a:solidFill>
+        </p:spPr>
+        <p:txBody>
+          <a:bodyPr wrap="none" rtlCol="0">
+            <a:spAutoFit/>
+          </a:bodyPr>
+          <a:lstStyle/>
+          <a:p>
+            <a:pPr algn="ctr"/>
+            <a:r>
+              <a:rPr lang="id-ID" sz="1200" dirty="0" smtClean="0">
+                <a:solidFill>
+                  <a:schemeClr val="bg1"/>
+                </a:solidFill>
+              </a:rPr>
+              <a:t>Campuran ke Biasa</a:t>
+            </a:r>
+            <a:endParaRPr lang="id-ID" sz="1200" dirty="0">
+              <a:solidFill>
+                <a:schemeClr val="bg1"/>
+              </a:solidFill>
+            </a:endParaRPr>
+          </a:p>
+        </p:txBody>
+      </p:sp>
+      <p:sp>
+        <p:nvSpPr>
+          <p:cNvPr id="14" name="13"/>
+          <p:cNvSpPr txBox="1"/>
+          <p:nvPr/>
+        </p:nvSpPr>
+        <p:spPr>
+          <a:xfrm>
+            <a:off x="2183173" y="604012"/>
+            <a:ext cx="495650" cy="461665"/>
+          </a:xfrm>
+          <a:prstGeom prst="rect">
+            <a:avLst/>
+          </a:prstGeom>
+          <a:noFill/>
+        </p:spPr>
+        <p:txBody>
+          <a:bodyPr wrap="none" rtlCol="0">
+            <a:spAutoFit/>
+          </a:bodyPr>
+          <a:lstStyle/>
+          <a:p>
+            <a:pPr algn="ctr"/>
+            <a:r>
+              <a:rPr lang="id-ID" sz="2400" dirty="0" smtClean="0"/>
+              <a:t>13</a:t>
+            </a:r>
+            <a:endParaRPr lang="id-ID" sz="2400" dirty="0"/>
+          </a:p>
+        </p:txBody>
+      </p:sp>
+    </p:spTree>
+    <p:extLst>
+      <p:ext uri="{BB962C8B-B14F-4D97-AF65-F5344CB8AC3E}">
+        <p14:creationId xmlns:p14="http://schemas.microsoft.com/office/powerpoint/2010/main" val="4203144786"/>
+      </p:ext>
+    </p:extLst>
+  </p:cSld>
+  <p:clrMapOvr>
+    <a:masterClrMapping/>
+  </p:clrMapOvr>
+  <mc:AlternateContent xmlns:mc="http://schemas.openxmlformats.org/markup-compatibility/2006" xmlns:p14="http://schemas.microsoft.com/office/powerpoint/2010/main">
+    <mc:Choice Requires="p14">
+      <p:transition spd="slow" p14:dur="2000" advClick="0" advTm="0"/>
+    </mc:Choice>
+    <mc:Fallback xmlns="">
+      <p:transition spd="slow" advClick="0" advTm="0"/>
+    </mc:Fallback>
+  </mc:AlternateContent>
+  <p:timing>
+    <p:tnLst>
+      <p:par>
+        <p:cTn id="1" dur="indefinite" restart="never" nodeType="tmRoot">
+          <p:childTnLst>
+            <p:seq concurrent="1" nextAc="seek">
+              <p:cTn id="2" dur="indefinite" nodeType="mainSeq">
+                <p:childTnLst>
+                  <p:par>
+                    <p:cTn id="3" fill="hold">
+                      <p:stCondLst>
+                        <p:cond delay="indefinite"/>
+                        <p:cond evt="onBegin" delay="0">
+                          <p:tn val="2"/>
+                        </p:cond>
+                      </p:stCondLst>
+                      <p:childTnLst>
+                        <p:par>
+                          <p:cTn id="4" fill="hold">
+                            <p:stCondLst>
+                              <p:cond delay="0"/>
+                            </p:stCondLst>
+                            <p:childTnLst>
+                              <p:par>
+                                <p:cTn id="5" presetID="10" presetClass="exit" presetSubtype="0" fill="hold" grpId="0" nodeType="withEffect">
+                                  <p:stCondLst>
+                                    <p:cond delay="0"/>
+                                  </p:stCondLst>
+                                  <p:childTnLst>
+                                    <p:animEffect transition="out" filter="fade">
+                                      <p:cBhvr>
+                                        <p:cTn id="6" dur="500"/>
+                                        <p:tgtEl>
+                                          <p:spTgt spid="10"/>
+                                        </p:tgtEl>
+                                      </p:cBhvr>
+                                    </p:animEffect>
+                                    <p:set>
+                                      <p:cBhvr>
+                                        <p:cTn id="7" dur="1" fill="hold">
+                                          <p:stCondLst>
+                                            <p:cond delay="499"/>
+                                          </p:stCondLst>
+                                        </p:cTn>
+                                        <p:tgtEl>
+                                          <p:spTgt spid="10"/>
+                                        </p:tgtEl>
+                                        <p:attrNameLst>
+                                          <p:attrName>style.visibility</p:attrName>
+                                        </p:attrNameLst>
+                                      </p:cBhvr>
+                                      <p:to>
+                                        <p:strVal val="hidden"/>
+                                      </p:to>
+                                    </p:set>
+                                  </p:childTnLst>
+                                </p:cTn>
+                              </p:par>
+                              <p:par>
+                                <p:cTn id="8" presetID="10" presetClass="entr" presetSubtype="0" fill="hold" grpId="0" nodeType="withEffect">
+                                  <p:stCondLst>
+                                    <p:cond delay="500"/>
+                                  </p:stCondLst>
+                                  <p:childTnLst>
+                                    <p:set>
+                                      <p:cBhvr>
+                                        <p:cTn id="9" dur="1" fill="hold">
+                                          <p:stCondLst>
+                                            <p:cond delay="0"/>
+                                          </p:stCondLst>
+                                        </p:cTn>
+                                        <p:tgtEl>
+                                          <p:spTgt spid="14"/>
+                                        </p:tgtEl>
+                                        <p:attrNameLst>
+                                          <p:attrName>style.visibility</p:attrName>
+                                        </p:attrNameLst>
+                                      </p:cBhvr>
+                                      <p:to>
+                                        <p:strVal val="visible"/>
+                                      </p:to>
+                                    </p:set>
+                                    <p:animEffect transition="in" filter="fade">
+                                      <p:cBhvr>
+                                        <p:cTn id="10" dur="500"/>
+                                        <p:tgtEl>
+                                          <p:spTgt spid="14"/>
+                                        </p:tgtEl>
+                                      </p:cBhvr>
+                                    </p:animEffect>
+                                  </p:childTnLst>
+                                </p:cTn>
+                              </p:par>
+                            </p:childTnLst>
+                          </p:cTn>
+                        </p:par>
+                      </p:childTnLst>
+                    </p:cTn>
+                  </p:par>
+                </p:childTnLst>
+              </p:cTn>
+              <p:prevCondLst>
+                <p:cond evt="onPrev" delay="0">
+                  <p:tgtEl>
+                    <p:sldTgt/>
+                  </p:tgtEl>
+                </p:cond>
+              </p:prevCondLst>
+              <p:nextCondLst>
+                <p:cond evt="onNext" delay="0">
+                  <p:tgtEl>
+                    <p:sldTgt/>
+                  </p:tgtEl>
+                </p:cond>
+              </p:nextCondLst>
+            </p:seq>
+          </p:childTnLst>
+        </p:cTn>
+      </p:par>
+    </p:tnLst>
+    <p:bldLst>
+      <p:bldP spid="10" grpId="0"/>
+      <p:bldP spid="14" grpId="0"/>
+    </p:bldLst>
   </p:timing>
 </p:sld>
 </file>
